--- a/道德经_第3天.pptx
+++ b/道德经_第3天.pptx
@@ -3092,14 +3092,6 @@
 <file path=ppt/slides/slide1.xml><?xml version="1.0" encoding="utf-8"?>
 <p:sld xmlns:a="http://schemas.openxmlformats.org/drawingml/2006/main" xmlns:p="http://schemas.openxmlformats.org/presentationml/2006/main" xmlns:r="http://schemas.openxmlformats.org/officeDocument/2006/relationships">
   <p:cSld>
-    <p:bg>
-      <p:bgPr>
-        <a:solidFill>
-          <a:srgbClr val="FCF8EE"/>
-        </a:solidFill>
-        <a:effectLst/>
-      </p:bgPr>
-    </p:bg>
     <p:spTree>
       <p:nvGrpSpPr>
         <p:cNvPr id="1" name=""/>
@@ -3115,14 +3107,14 @@
         </p:nvSpPr>
         <p:spPr>
           <a:xfrm>
-            <a:off x="1371600" y="2011680"/>
-            <a:ext cx="6400800" cy="36576"/>
+            <a:off x="0" y="0"/>
+            <a:ext cx="9144000" cy="1371600"/>
           </a:xfrm>
           <a:prstGeom prst="rect">
             <a:avLst/>
           </a:prstGeom>
           <a:solidFill>
-            <a:srgbClr val="C8A03C"/>
+            <a:srgbClr val="1E3C72"/>
           </a:solidFill>
           <a:ln>
             <a:noFill/>
@@ -3158,8 +3150,8 @@
         </p:nvSpPr>
         <p:spPr>
           <a:xfrm>
-            <a:off x="457200" y="2194560"/>
-            <a:ext cx="8229600" cy="1097280"/>
+            <a:off x="457200" y="320040"/>
+            <a:ext cx="8229600" cy="914400"/>
           </a:xfrm>
           <a:prstGeom prst="rect">
             <a:avLst/>
@@ -3167,59 +3159,111 @@
           <a:noFill/>
         </p:spPr>
         <p:txBody>
-          <a:bodyPr wrap="square">
+          <a:bodyPr wrap="none">
             <a:spAutoFit/>
           </a:bodyPr>
           <a:lstStyle/>
           <a:p>
+            <a:pPr>
+              <a:defRPr sz="3600" b="1">
+                <a:solidFill>
+                  <a:srgbClr val="FFFFFF"/>
+                </a:solidFill>
+              </a:defRPr>
+            </a:pPr>
+            <a:r>
+              <a:t>国学经典24章 · 第三天</a:t>
+            </a:r>
+          </a:p>
+        </p:txBody>
+      </p:sp>
+      <p:sp>
+        <p:nvSpPr>
+          <p:cNvPr id="4" name="TextBox 3"/>
+          <p:cNvSpPr txBox="1"/>
+          <p:nvPr/>
+        </p:nvSpPr>
+        <p:spPr>
+          <a:xfrm>
+            <a:off x="914400" y="2560320"/>
+            <a:ext cx="7315200" cy="1371600"/>
+          </a:xfrm>
+          <a:prstGeom prst="rect">
+            <a:avLst/>
+          </a:prstGeom>
+          <a:noFill/>
+        </p:spPr>
+        <p:txBody>
+          <a:bodyPr wrap="none">
+            <a:spAutoFit/>
+          </a:bodyPr>
+          <a:lstStyle/>
+          <a:p>
             <a:pPr algn="ctr">
-              <a:defRPr sz="4800" b="1">
-                <a:solidFill>
-                  <a:srgbClr val="502814"/>
-                </a:solidFill>
-              </a:defRPr>
-            </a:pPr>
-            <a:r>
-              <a:t>道德经 · 第三天</a:t>
-            </a:r>
-          </a:p>
+              <a:defRPr sz="5600" b="1">
+                <a:solidFill>
+                  <a:srgbClr val="1E3C72"/>
+                </a:solidFill>
+              </a:defRPr>
+            </a:pPr>
+            <a:r>
+              <a:t>《道德经》第7-9章</a:t>
+            </a:r>
+          </a:p>
+        </p:txBody>
+      </p:sp>
+      <p:sp>
+        <p:nvSpPr>
+          <p:cNvPr id="5" name="TextBox 4"/>
+          <p:cNvSpPr txBox="1"/>
+          <p:nvPr/>
+        </p:nvSpPr>
+        <p:spPr>
+          <a:xfrm>
+            <a:off x="914400" y="4114800"/>
+            <a:ext cx="7315200" cy="914400"/>
+          </a:xfrm>
+          <a:prstGeom prst="rect">
+            <a:avLst/>
+          </a:prstGeom>
+          <a:noFill/>
+        </p:spPr>
+        <p:txBody>
+          <a:bodyPr wrap="none">
+            <a:spAutoFit/>
+          </a:bodyPr>
+          <a:lstStyle/>
           <a:p>
             <a:pPr algn="ctr">
-              <a:spcBef>
-                <a:spcPts val="1200"/>
-              </a:spcBef>
-              <a:defRPr sz="2200">
-                <a:solidFill>
-                  <a:srgbClr val="B45A28"/>
-                </a:solidFill>
-              </a:defRPr>
-            </a:pPr>
-            <a:r>
-              <a:t>第7章 · 第8章 · 第9章</a:t>
-            </a:r>
-          </a:p>
-        </p:txBody>
-      </p:sp>
-      <p:sp>
-        <p:nvSpPr>
-          <p:cNvPr id="4" name="Rectangle 3"/>
+              <a:defRPr sz="2800">
+                <a:solidFill>
+                  <a:srgbClr val="4682B4"/>
+                </a:solidFill>
+              </a:defRPr>
+            </a:pPr>
+            <a:r>
+              <a:t>天长地久 · 上善若水 · 功遂身退</a:t>
+            </a:r>
+          </a:p>
+        </p:txBody>
+      </p:sp>
+      <p:sp>
+        <p:nvSpPr>
+          <p:cNvPr id="6" name="Rounded Rectangle 5"/>
           <p:cNvSpPr/>
           <p:nvPr/>
         </p:nvSpPr>
         <p:spPr>
           <a:xfrm>
-            <a:off x="1371600" y="3657600"/>
-            <a:ext cx="6400800" cy="36576"/>
-          </a:xfrm>
-          <a:prstGeom prst="rect">
+            <a:off x="1828800" y="5303520"/>
+            <a:ext cx="5486400" cy="1097280"/>
+          </a:xfrm>
+          <a:prstGeom prst="roundRect">
             <a:avLst/>
           </a:prstGeom>
           <a:solidFill>
-            <a:srgbClr val="C8A03C"/>
+            <a:srgbClr val="F5F5F0"/>
           </a:solidFill>
-          <a:ln>
-            <a:noFill/>
-          </a:ln>
         </p:spPr>
         <p:style>
           <a:lnRef idx="1">
@@ -3236,58 +3280,44 @@
           </a:fontRef>
         </p:style>
         <p:txBody>
-          <a:bodyPr rtlCol="0" anchor="ctr"/>
-          <a:lstStyle/>
-          <a:p>
-            <a:pPr algn="ctr"/>
-          </a:p>
-        </p:txBody>
-      </p:sp>
-      <p:sp>
-        <p:nvSpPr>
-          <p:cNvPr id="5" name="TextBox 4"/>
+          <a:bodyPr rtlCol="0" anchor="ctr" wrap="square"/>
+          <a:lstStyle/>
+          <a:p>
+            <a:pPr algn="ctr">
+              <a:defRPr sz="2200" i="1">
+                <a:solidFill>
+                  <a:srgbClr val="1E3C72"/>
+                </a:solidFill>
+              </a:defRPr>
+            </a:pPr>
+            <a:r>
+              <a:t>「上善若水，水善利万物而不争。」</a:t>
+            </a:r>
+          </a:p>
+          <a:p>
+            <a:pPr algn="ctr">
+              <a:defRPr sz="1400">
+                <a:solidFill>
+                  <a:srgbClr val="969696"/>
+                </a:solidFill>
+              </a:defRPr>
+            </a:pPr>
+            <a:r>
+              <a:t>—— 《道德经》第八章</a:t>
+            </a:r>
+          </a:p>
+        </p:txBody>
+      </p:sp>
+      <p:sp>
+        <p:nvSpPr>
+          <p:cNvPr id="7" name="TextBox 6"/>
           <p:cNvSpPr txBox="1"/>
           <p:nvPr/>
         </p:nvSpPr>
         <p:spPr>
           <a:xfrm>
-            <a:off x="914400" y="3931920"/>
-            <a:ext cx="7315200" cy="1097280"/>
-          </a:xfrm>
-          <a:prstGeom prst="rect">
-            <a:avLst/>
-          </a:prstGeom>
-          <a:noFill/>
-        </p:spPr>
-        <p:txBody>
-          <a:bodyPr wrap="square">
-            <a:spAutoFit/>
-          </a:bodyPr>
-          <a:lstStyle/>
-          <a:p>
-            <a:pPr algn="ctr">
-              <a:defRPr sz="1800" i="1">
-                <a:solidFill>
-                  <a:srgbClr val="B45A28"/>
-                </a:solidFill>
-              </a:defRPr>
-            </a:pPr>
-            <a:r>
-              <a:t>「上善若水，水善利万物而不争。」</a:t>
-            </a:r>
-          </a:p>
-        </p:txBody>
-      </p:sp>
-      <p:sp>
-        <p:nvSpPr>
-          <p:cNvPr id="6" name="TextBox 5"/>
-          <p:cNvSpPr txBox="1"/>
-          <p:nvPr/>
-        </p:nvSpPr>
-        <p:spPr>
-          <a:xfrm>
-            <a:off x="0" y="6400800"/>
-            <a:ext cx="9144000" cy="365760"/>
+            <a:off x="8229600" y="6400800"/>
+            <a:ext cx="731520" cy="274320"/>
           </a:xfrm>
           <a:prstGeom prst="rect">
             <a:avLst/>
@@ -3300,15 +3330,15 @@
           </a:bodyPr>
           <a:lstStyle/>
           <a:p>
-            <a:pPr algn="ctr">
+            <a:pPr algn="r">
               <a:defRPr sz="1000">
                 <a:solidFill>
-                  <a:srgbClr val="B45A28"/>
-                </a:solidFill>
-              </a:defRPr>
-            </a:pPr>
-            <a:r>
-              <a:t>《道德经》打卡学习 · 小燕子 🐦</a:t>
+                  <a:srgbClr val="969696"/>
+                </a:solidFill>
+              </a:defRPr>
+            </a:pPr>
+            <a:r>
+              <a:t>1/12</a:t>
             </a:r>
           </a:p>
         </p:txBody>
@@ -3324,14 +3354,6 @@
 <file path=ppt/slides/slide10.xml><?xml version="1.0" encoding="utf-8"?>
 <p:sld xmlns:a="http://schemas.openxmlformats.org/drawingml/2006/main" xmlns:p="http://schemas.openxmlformats.org/presentationml/2006/main" xmlns:r="http://schemas.openxmlformats.org/officeDocument/2006/relationships">
   <p:cSld>
-    <p:bg>
-      <p:bgPr>
-        <a:solidFill>
-          <a:srgbClr val="FCF8EE"/>
-        </a:solidFill>
-        <a:effectLst/>
-      </p:bgPr>
-    </p:bg>
     <p:spTree>
       <p:nvGrpSpPr>
         <p:cNvPr id="1" name=""/>
@@ -3348,13 +3370,13 @@
         <p:spPr>
           <a:xfrm>
             <a:off x="0" y="0"/>
-            <a:ext cx="9144000" cy="1188720"/>
+            <a:ext cx="9144000" cy="1097280"/>
           </a:xfrm>
           <a:prstGeom prst="rect">
             <a:avLst/>
           </a:prstGeom>
           <a:solidFill>
-            <a:srgbClr val="502814"/>
+            <a:srgbClr val="1E3C72"/>
           </a:solidFill>
           <a:ln>
             <a:noFill/>
@@ -3390,8 +3412,8 @@
         </p:nvSpPr>
         <p:spPr>
           <a:xfrm>
-            <a:off x="457200" y="73152"/>
-            <a:ext cx="8229600" cy="411480"/>
+            <a:off x="457200" y="228600"/>
+            <a:ext cx="8229600" cy="731520"/>
           </a:xfrm>
           <a:prstGeom prst="rect">
             <a:avLst/>
@@ -3405,248 +3427,35 @@
           <a:lstStyle/>
           <a:p>
             <a:pPr>
-              <a:defRPr sz="1300">
-                <a:solidFill>
-                  <a:srgbClr val="C8A03C"/>
-                </a:solidFill>
-              </a:defRPr>
-            </a:pPr>
-            <a:r>
-              <a:t>Chapter 9 · Insights</a:t>
-            </a:r>
-          </a:p>
-        </p:txBody>
-      </p:sp>
-      <p:sp>
-        <p:nvSpPr>
-          <p:cNvPr id="4" name="TextBox 3"/>
-          <p:cNvSpPr txBox="1"/>
-          <p:nvPr/>
-        </p:nvSpPr>
-        <p:spPr>
-          <a:xfrm>
-            <a:off x="457200" y="347472"/>
-            <a:ext cx="8229600" cy="685800"/>
-          </a:xfrm>
-          <a:prstGeom prst="rect">
-            <a:avLst/>
-          </a:prstGeom>
-          <a:noFill/>
-        </p:spPr>
-        <p:txBody>
-          <a:bodyPr wrap="none">
-            <a:spAutoFit/>
-          </a:bodyPr>
-          <a:lstStyle/>
-          <a:p>
-            <a:pPr>
-              <a:defRPr sz="2600" b="1">
+              <a:defRPr sz="3200" b="1">
                 <a:solidFill>
                   <a:srgbClr val="FFFFFF"/>
                 </a:solidFill>
               </a:defRPr>
             </a:pPr>
             <a:r>
-              <a:t>第9章 · 精华提炼</a:t>
-            </a:r>
-          </a:p>
-        </p:txBody>
-      </p:sp>
-      <p:sp>
-        <p:nvSpPr>
-          <p:cNvPr id="5" name="TextBox 4"/>
-          <p:cNvSpPr txBox="1"/>
-          <p:nvPr/>
-        </p:nvSpPr>
-        <p:spPr>
-          <a:xfrm>
-            <a:off x="0" y="6400800"/>
-            <a:ext cx="9144000" cy="365760"/>
-          </a:xfrm>
-          <a:prstGeom prst="rect">
-            <a:avLst/>
-          </a:prstGeom>
-          <a:noFill/>
-        </p:spPr>
-        <p:txBody>
-          <a:bodyPr wrap="none">
-            <a:spAutoFit/>
-          </a:bodyPr>
-          <a:lstStyle/>
-          <a:p>
-            <a:pPr algn="ctr">
-              <a:defRPr sz="1000">
-                <a:solidFill>
-                  <a:srgbClr val="B45A28"/>
-                </a:solidFill>
-              </a:defRPr>
-            </a:pPr>
-            <a:r>
-              <a:t>《道德经》打卡学习 · 小燕子 🐦</a:t>
-            </a:r>
-          </a:p>
-        </p:txBody>
-      </p:sp>
-      <p:sp>
-        <p:nvSpPr>
-          <p:cNvPr id="6" name="TextBox 5"/>
-          <p:cNvSpPr txBox="1"/>
-          <p:nvPr/>
-        </p:nvSpPr>
-        <p:spPr>
-          <a:xfrm>
-            <a:off x="731520" y="1"/>
-            <a:ext cx="7680960" cy="731520"/>
-          </a:xfrm>
-          <a:prstGeom prst="rect">
-            <a:avLst/>
-          </a:prstGeom>
-          <a:noFill/>
-        </p:spPr>
-        <p:txBody>
-          <a:bodyPr wrap="square">
-            <a:spAutoFit/>
-          </a:bodyPr>
-          <a:lstStyle/>
-          <a:p>
-            <a:pPr>
-              <a:defRPr sz="1600">
-                <a:solidFill>
-                  <a:srgbClr val="321E0F"/>
-                </a:solidFill>
-              </a:defRPr>
-            </a:pPr>
-            <a:r>
-              <a:t>✅ 核心要义：功成身退是自然天道，贪恋富贵、锋芒毕露必招祸患。</a:t>
-            </a:r>
-          </a:p>
-        </p:txBody>
-      </p:sp>
-      <p:sp>
-        <p:nvSpPr>
-          <p:cNvPr id="7" name="TextBox 6"/>
-          <p:cNvSpPr txBox="1"/>
-          <p:nvPr/>
-        </p:nvSpPr>
-        <p:spPr>
-          <a:xfrm>
-            <a:off x="731520" y="2"/>
-            <a:ext cx="7680960" cy="731520"/>
-          </a:xfrm>
-          <a:prstGeom prst="rect">
-            <a:avLst/>
-          </a:prstGeom>
-          <a:noFill/>
-        </p:spPr>
-        <p:txBody>
-          <a:bodyPr wrap="square">
-            <a:spAutoFit/>
-          </a:bodyPr>
-          <a:lstStyle/>
-          <a:p>
-            <a:pPr>
-              <a:defRPr sz="1600">
-                <a:solidFill>
-                  <a:srgbClr val="321E0F"/>
-                </a:solidFill>
-              </a:defRPr>
-            </a:pPr>
-            <a:r>
-              <a:t>✅ 关键词：持盈、揣锐、富贵而骄、功遂身退。</a:t>
-            </a:r>
-          </a:p>
-        </p:txBody>
-      </p:sp>
-      <p:sp>
-        <p:nvSpPr>
-          <p:cNvPr id="8" name="TextBox 7"/>
-          <p:cNvSpPr txBox="1"/>
-          <p:nvPr/>
-        </p:nvSpPr>
-        <p:spPr>
-          <a:xfrm>
-            <a:off x="731520" y="3"/>
-            <a:ext cx="7680960" cy="731520"/>
-          </a:xfrm>
-          <a:prstGeom prst="rect">
-            <a:avLst/>
-          </a:prstGeom>
-          <a:noFill/>
-        </p:spPr>
-        <p:txBody>
-          <a:bodyPr wrap="square">
-            <a:spAutoFit/>
-          </a:bodyPr>
-          <a:lstStyle/>
-          <a:p>
-            <a:pPr>
-              <a:defRPr sz="1600">
-                <a:solidFill>
-                  <a:srgbClr val="321E0F"/>
-                </a:solidFill>
-              </a:defRPr>
-            </a:pPr>
-            <a:r>
-              <a:t>✅ 生活践行：见好就收，不追求完美结局；得意时想到退路。</a:t>
-            </a:r>
-          </a:p>
-        </p:txBody>
-      </p:sp>
-      <p:sp>
-        <p:nvSpPr>
-          <p:cNvPr id="9" name="TextBox 8"/>
-          <p:cNvSpPr txBox="1"/>
-          <p:nvPr/>
-        </p:nvSpPr>
-        <p:spPr>
-          <a:xfrm>
-            <a:off x="731520" y="4"/>
-            <a:ext cx="7680960" cy="731520"/>
-          </a:xfrm>
-          <a:prstGeom prst="rect">
-            <a:avLst/>
-          </a:prstGeom>
-          <a:noFill/>
-        </p:spPr>
-        <p:txBody>
-          <a:bodyPr wrap="square">
-            <a:spAutoFit/>
-          </a:bodyPr>
-          <a:lstStyle/>
-          <a:p>
-            <a:pPr>
-              <a:defRPr sz="1600">
-                <a:solidFill>
-                  <a:srgbClr val="321E0F"/>
-                </a:solidFill>
-              </a:defRPr>
-            </a:pPr>
-            <a:r>
-              <a:t>✅ 领导力启示：功高震主时，主动让功于团队，不独占荣誉。</a:t>
-            </a:r>
-          </a:p>
-        </p:txBody>
-      </p:sp>
-      <p:sp>
-        <p:nvSpPr>
-          <p:cNvPr id="10" name="Rounded Rectangle 9"/>
+              <a:t>第九章 · 精华提炼</a:t>
+            </a:r>
+          </a:p>
+        </p:txBody>
+      </p:sp>
+      <p:sp>
+        <p:nvSpPr>
+          <p:cNvPr id="4" name="Rounded Rectangle 3"/>
           <p:cNvSpPr/>
           <p:nvPr/>
         </p:nvSpPr>
         <p:spPr>
           <a:xfrm>
-            <a:off x="731520" y="4846320"/>
-            <a:ext cx="7680960" cy="1188720"/>
+            <a:off x="457200" y="1280160"/>
+            <a:ext cx="8229600" cy="914400"/>
           </a:xfrm>
           <a:prstGeom prst="roundRect">
             <a:avLst/>
           </a:prstGeom>
           <a:solidFill>
-            <a:srgbClr val="B45A28"/>
+            <a:srgbClr val="F5F5F0"/>
           </a:solidFill>
-          <a:ln>
-            <a:noFill/>
-          </a:ln>
         </p:spPr>
         <p:style>
           <a:lnRef idx="1">
@@ -3663,23 +3472,228 @@
           </a:fontRef>
         </p:style>
         <p:txBody>
-          <a:bodyPr rtlCol="0" anchor="ctr"/>
-          <a:lstStyle/>
-          <a:p>
-            <a:pPr algn="ctr"/>
-          </a:p>
-        </p:txBody>
-      </p:sp>
-      <p:sp>
-        <p:nvSpPr>
-          <p:cNvPr id="11" name="TextBox 10"/>
+          <a:bodyPr rtlCol="0" anchor="ctr" wrap="square"/>
+          <a:lstStyle/>
+          <a:p>
+            <a:pPr algn="ctr">
+              <a:defRPr sz="1600">
+                <a:solidFill>
+                  <a:srgbClr val="333333"/>
+                </a:solidFill>
+              </a:defRPr>
+            </a:pPr>
+            <a:r>
+              <a:t>• 核心要义：功成身退是自然天道，贪恋富贵、锋芒毕露必招祸患。</a:t>
+            </a:r>
+          </a:p>
+        </p:txBody>
+      </p:sp>
+      <p:sp>
+        <p:nvSpPr>
+          <p:cNvPr id="5" name="Rounded Rectangle 4"/>
+          <p:cNvSpPr/>
+          <p:nvPr/>
+        </p:nvSpPr>
+        <p:spPr>
+          <a:xfrm>
+            <a:off x="457200" y="2286000"/>
+            <a:ext cx="8229600" cy="914400"/>
+          </a:xfrm>
+          <a:prstGeom prst="roundRect">
+            <a:avLst/>
+          </a:prstGeom>
+          <a:solidFill>
+            <a:srgbClr val="F5F5F0"/>
+          </a:solidFill>
+        </p:spPr>
+        <p:style>
+          <a:lnRef idx="1">
+            <a:schemeClr val="accent1"/>
+          </a:lnRef>
+          <a:fillRef idx="3">
+            <a:schemeClr val="accent1"/>
+          </a:fillRef>
+          <a:effectRef idx="2">
+            <a:schemeClr val="accent1"/>
+          </a:effectRef>
+          <a:fontRef idx="minor">
+            <a:schemeClr val="lt1"/>
+          </a:fontRef>
+        </p:style>
+        <p:txBody>
+          <a:bodyPr rtlCol="0" anchor="ctr" wrap="square"/>
+          <a:lstStyle/>
+          <a:p>
+            <a:pPr algn="ctr">
+              <a:defRPr sz="1600">
+                <a:solidFill>
+                  <a:srgbClr val="333333"/>
+                </a:solidFill>
+              </a:defRPr>
+            </a:pPr>
+            <a:r>
+              <a:t>• 关键词：持盈、揣锐、富贵而骄、功遂身退。</a:t>
+            </a:r>
+          </a:p>
+        </p:txBody>
+      </p:sp>
+      <p:sp>
+        <p:nvSpPr>
+          <p:cNvPr id="6" name="Rounded Rectangle 5"/>
+          <p:cNvSpPr/>
+          <p:nvPr/>
+        </p:nvSpPr>
+        <p:spPr>
+          <a:xfrm>
+            <a:off x="457200" y="3291840"/>
+            <a:ext cx="8229600" cy="914400"/>
+          </a:xfrm>
+          <a:prstGeom prst="roundRect">
+            <a:avLst/>
+          </a:prstGeom>
+          <a:solidFill>
+            <a:srgbClr val="F5F5F0"/>
+          </a:solidFill>
+        </p:spPr>
+        <p:style>
+          <a:lnRef idx="1">
+            <a:schemeClr val="accent1"/>
+          </a:lnRef>
+          <a:fillRef idx="3">
+            <a:schemeClr val="accent1"/>
+          </a:fillRef>
+          <a:effectRef idx="2">
+            <a:schemeClr val="accent1"/>
+          </a:effectRef>
+          <a:fontRef idx="minor">
+            <a:schemeClr val="lt1"/>
+          </a:fontRef>
+        </p:style>
+        <p:txBody>
+          <a:bodyPr rtlCol="0" anchor="ctr" wrap="square"/>
+          <a:lstStyle/>
+          <a:p>
+            <a:pPr algn="ctr">
+              <a:defRPr sz="1600">
+                <a:solidFill>
+                  <a:srgbClr val="333333"/>
+                </a:solidFill>
+              </a:defRPr>
+            </a:pPr>
+            <a:r>
+              <a:t>• 生活践行：见好就收，不追求完美结局；得意时想到退路。</a:t>
+            </a:r>
+          </a:p>
+        </p:txBody>
+      </p:sp>
+      <p:sp>
+        <p:nvSpPr>
+          <p:cNvPr id="7" name="Rounded Rectangle 6"/>
+          <p:cNvSpPr/>
+          <p:nvPr/>
+        </p:nvSpPr>
+        <p:spPr>
+          <a:xfrm>
+            <a:off x="457200" y="4297680"/>
+            <a:ext cx="8229600" cy="914400"/>
+          </a:xfrm>
+          <a:prstGeom prst="roundRect">
+            <a:avLst/>
+          </a:prstGeom>
+          <a:solidFill>
+            <a:srgbClr val="F5F5F0"/>
+          </a:solidFill>
+        </p:spPr>
+        <p:style>
+          <a:lnRef idx="1">
+            <a:schemeClr val="accent1"/>
+          </a:lnRef>
+          <a:fillRef idx="3">
+            <a:schemeClr val="accent1"/>
+          </a:fillRef>
+          <a:effectRef idx="2">
+            <a:schemeClr val="accent1"/>
+          </a:effectRef>
+          <a:fontRef idx="minor">
+            <a:schemeClr val="lt1"/>
+          </a:fontRef>
+        </p:style>
+        <p:txBody>
+          <a:bodyPr rtlCol="0" anchor="ctr" wrap="square"/>
+          <a:lstStyle/>
+          <a:p>
+            <a:pPr algn="ctr">
+              <a:defRPr sz="1600">
+                <a:solidFill>
+                  <a:srgbClr val="333333"/>
+                </a:solidFill>
+              </a:defRPr>
+            </a:pPr>
+            <a:r>
+              <a:t>• 领导力启示：功高震主时，主动让功于团队，不独占荣誉。</a:t>
+            </a:r>
+          </a:p>
+        </p:txBody>
+      </p:sp>
+      <p:sp>
+        <p:nvSpPr>
+          <p:cNvPr id="8" name="Rounded Rectangle 7"/>
+          <p:cNvSpPr/>
+          <p:nvPr/>
+        </p:nvSpPr>
+        <p:spPr>
+          <a:xfrm>
+            <a:off x="457200" y="5303520"/>
+            <a:ext cx="8229600" cy="914400"/>
+          </a:xfrm>
+          <a:prstGeom prst="roundRect">
+            <a:avLst/>
+          </a:prstGeom>
+          <a:solidFill>
+            <a:srgbClr val="4682B4"/>
+          </a:solidFill>
+        </p:spPr>
+        <p:style>
+          <a:lnRef idx="1">
+            <a:schemeClr val="accent1"/>
+          </a:lnRef>
+          <a:fillRef idx="3">
+            <a:schemeClr val="accent1"/>
+          </a:fillRef>
+          <a:effectRef idx="2">
+            <a:schemeClr val="accent1"/>
+          </a:effectRef>
+          <a:fontRef idx="minor">
+            <a:schemeClr val="lt1"/>
+          </a:fontRef>
+        </p:style>
+        <p:txBody>
+          <a:bodyPr rtlCol="0" anchor="ctr" wrap="square"/>
+          <a:lstStyle/>
+          <a:p>
+            <a:pPr algn="ctr">
+              <a:defRPr sz="1600">
+                <a:solidFill>
+                  <a:srgbClr val="FFFFFF"/>
+                </a:solidFill>
+              </a:defRPr>
+            </a:pPr>
+            <a:r>
+              <a:t>一句话总结：月圆则亏，水满则溢——功成之日，即是退隐之时。</a:t>
+            </a:r>
+          </a:p>
+        </p:txBody>
+      </p:sp>
+      <p:sp>
+        <p:nvSpPr>
+          <p:cNvPr id="9" name="TextBox 8"/>
           <p:cNvSpPr txBox="1"/>
           <p:nvPr/>
         </p:nvSpPr>
         <p:spPr>
           <a:xfrm>
-            <a:off x="914400" y="5029200"/>
-            <a:ext cx="7315200" cy="914400"/>
+            <a:off x="8229600" y="6400800"/>
+            <a:ext cx="731520" cy="274320"/>
           </a:xfrm>
           <a:prstGeom prst="rect">
             <a:avLst/>
@@ -3687,20 +3701,20 @@
           <a:noFill/>
         </p:spPr>
         <p:txBody>
-          <a:bodyPr wrap="square">
+          <a:bodyPr wrap="none">
             <a:spAutoFit/>
           </a:bodyPr>
           <a:lstStyle/>
           <a:p>
-            <a:pPr algn="ctr">
-              <a:defRPr sz="1600">
-                <a:solidFill>
-                  <a:srgbClr val="FFFFFF"/>
-                </a:solidFill>
-              </a:defRPr>
-            </a:pPr>
-            <a:r>
-              <a:t>💡 一句话总结：月圆则亏，水满则溢——功成之日，即是退隐之时。</a:t>
+            <a:pPr algn="r">
+              <a:defRPr sz="1000">
+                <a:solidFill>
+                  <a:srgbClr val="969696"/>
+                </a:solidFill>
+              </a:defRPr>
+            </a:pPr>
+            <a:r>
+              <a:t>10/12</a:t>
             </a:r>
           </a:p>
         </p:txBody>
@@ -3716,14 +3730,6 @@
 <file path=ppt/slides/slide11.xml><?xml version="1.0" encoding="utf-8"?>
 <p:sld xmlns:a="http://schemas.openxmlformats.org/drawingml/2006/main" xmlns:p="http://schemas.openxmlformats.org/presentationml/2006/main" xmlns:r="http://schemas.openxmlformats.org/officeDocument/2006/relationships">
   <p:cSld>
-    <p:bg>
-      <p:bgPr>
-        <a:solidFill>
-          <a:srgbClr val="FCF8EE"/>
-        </a:solidFill>
-        <a:effectLst/>
-      </p:bgPr>
-    </p:bg>
     <p:spTree>
       <p:nvGrpSpPr>
         <p:cNvPr id="1" name=""/>
@@ -3740,13 +3746,13 @@
         <p:spPr>
           <a:xfrm>
             <a:off x="0" y="0"/>
-            <a:ext cx="9144000" cy="1188720"/>
+            <a:ext cx="9144000" cy="1097280"/>
           </a:xfrm>
           <a:prstGeom prst="rect">
             <a:avLst/>
           </a:prstGeom>
           <a:solidFill>
-            <a:srgbClr val="502814"/>
+            <a:srgbClr val="1E3C72"/>
           </a:solidFill>
           <a:ln>
             <a:noFill/>
@@ -3782,8 +3788,8 @@
         </p:nvSpPr>
         <p:spPr>
           <a:xfrm>
-            <a:off x="457200" y="73152"/>
-            <a:ext cx="8229600" cy="411480"/>
+            <a:off x="457200" y="228600"/>
+            <a:ext cx="8229600" cy="731520"/>
           </a:xfrm>
           <a:prstGeom prst="rect">
             <a:avLst/>
@@ -3797,42 +3803,7 @@
           <a:lstStyle/>
           <a:p>
             <a:pPr>
-              <a:defRPr sz="1300">
-                <a:solidFill>
-                  <a:srgbClr val="C8A03C"/>
-                </a:solidFill>
-              </a:defRPr>
-            </a:pPr>
-            <a:r>
-              <a:t>Review: Ch 7-9</a:t>
-            </a:r>
-          </a:p>
-        </p:txBody>
-      </p:sp>
-      <p:sp>
-        <p:nvSpPr>
-          <p:cNvPr id="4" name="TextBox 3"/>
-          <p:cNvSpPr txBox="1"/>
-          <p:nvPr/>
-        </p:nvSpPr>
-        <p:spPr>
-          <a:xfrm>
-            <a:off x="457200" y="347472"/>
-            <a:ext cx="8229600" cy="685800"/>
-          </a:xfrm>
-          <a:prstGeom prst="rect">
-            <a:avLst/>
-          </a:prstGeom>
-          <a:noFill/>
-        </p:spPr>
-        <p:txBody>
-          <a:bodyPr wrap="none">
-            <a:spAutoFit/>
-          </a:bodyPr>
-          <a:lstStyle/>
-          <a:p>
-            <a:pPr>
-              <a:defRPr sz="2600" b="1">
+              <a:defRPr sz="3200" b="1">
                 <a:solidFill>
                   <a:srgbClr val="FFFFFF"/>
                 </a:solidFill>
@@ -3846,61 +3817,21 @@
       </p:sp>
       <p:sp>
         <p:nvSpPr>
-          <p:cNvPr id="5" name="TextBox 4"/>
-          <p:cNvSpPr txBox="1"/>
-          <p:nvPr/>
-        </p:nvSpPr>
-        <p:spPr>
-          <a:xfrm>
-            <a:off x="0" y="6400800"/>
-            <a:ext cx="9144000" cy="365760"/>
-          </a:xfrm>
-          <a:prstGeom prst="rect">
-            <a:avLst/>
-          </a:prstGeom>
-          <a:noFill/>
-        </p:spPr>
-        <p:txBody>
-          <a:bodyPr wrap="none">
-            <a:spAutoFit/>
-          </a:bodyPr>
-          <a:lstStyle/>
-          <a:p>
-            <a:pPr algn="ctr">
-              <a:defRPr sz="1000">
-                <a:solidFill>
-                  <a:srgbClr val="B45A28"/>
-                </a:solidFill>
-              </a:defRPr>
-            </a:pPr>
-            <a:r>
-              <a:t>《道德经》打卡学习 · 小燕子 🐦</a:t>
-            </a:r>
-          </a:p>
-        </p:txBody>
-      </p:sp>
-      <p:sp>
-        <p:nvSpPr>
-          <p:cNvPr id="6" name="Rounded Rectangle 5"/>
+          <p:cNvPr id="4" name="Rounded Rectangle 3"/>
           <p:cNvSpPr/>
           <p:nvPr/>
         </p:nvSpPr>
         <p:spPr>
           <a:xfrm>
-            <a:off x="457200" y="1"/>
-            <a:ext cx="8229600" cy="1280160"/>
+            <a:off x="457200" y="1280160"/>
+            <a:ext cx="8229600" cy="1371600"/>
           </a:xfrm>
           <a:prstGeom prst="roundRect">
             <a:avLst/>
           </a:prstGeom>
           <a:solidFill>
-            <a:srgbClr val="F0E8DA"/>
+            <a:srgbClr val="F5F5F0"/>
           </a:solidFill>
-          <a:ln>
-            <a:solidFill>
-              <a:srgbClr val="C8A03C"/>
-            </a:solidFill>
-          </a:ln>
         </p:spPr>
         <p:style>
           <a:lnRef idx="1">
@@ -3917,175 +3848,63 @@
           </a:fontRef>
         </p:style>
         <p:txBody>
-          <a:bodyPr rtlCol="0" anchor="ctr"/>
-          <a:lstStyle/>
-          <a:p>
-            <a:pPr algn="ctr"/>
-          </a:p>
-        </p:txBody>
-      </p:sp>
-      <p:sp>
-        <p:nvSpPr>
-          <p:cNvPr id="7" name="TextBox 6"/>
-          <p:cNvSpPr txBox="1"/>
-          <p:nvPr/>
-        </p:nvSpPr>
-        <p:spPr>
-          <a:xfrm>
-            <a:off x="640080" y="1"/>
-            <a:ext cx="1828800" cy="365760"/>
-          </a:xfrm>
-          <a:prstGeom prst="rect">
-            <a:avLst/>
-          </a:prstGeom>
-          <a:noFill/>
-        </p:spPr>
-        <p:txBody>
-          <a:bodyPr wrap="none">
-            <a:spAutoFit/>
-          </a:bodyPr>
-          <a:lstStyle/>
+          <a:bodyPr rtlCol="0" anchor="ctr" wrap="square"/>
+          <a:lstStyle/>
+          <a:p>
+            <a:pPr algn="ctr">
+              <a:defRPr sz="1800" b="1">
+                <a:solidFill>
+                  <a:srgbClr val="1E3C72"/>
+                </a:solidFill>
+              </a:defRPr>
+            </a:pPr>
+            <a:r>
+              <a:t>第七章 · 天长地久</a:t>
+            </a:r>
+          </a:p>
           <a:p>
             <a:pPr>
-              <a:defRPr sz="1300" b="1">
-                <a:solidFill>
-                  <a:srgbClr val="B45A28"/>
-                </a:solidFill>
-              </a:defRPr>
-            </a:pPr>
-            <a:r>
-              <a:t>第7章</a:t>
-            </a:r>
-          </a:p>
-        </p:txBody>
-      </p:sp>
-      <p:sp>
-        <p:nvSpPr>
-          <p:cNvPr id="8" name="TextBox 7"/>
-          <p:cNvSpPr txBox="1"/>
-          <p:nvPr/>
-        </p:nvSpPr>
-        <p:spPr>
-          <a:xfrm>
-            <a:off x="2286000" y="1"/>
-            <a:ext cx="6217920" cy="411480"/>
-          </a:xfrm>
-          <a:prstGeom prst="rect">
-            <a:avLst/>
-          </a:prstGeom>
-          <a:noFill/>
-        </p:spPr>
-        <p:txBody>
-          <a:bodyPr wrap="none">
-            <a:spAutoFit/>
-          </a:bodyPr>
-          <a:lstStyle/>
+              <a:defRPr sz="1400">
+                <a:solidFill>
+                  <a:srgbClr val="333333"/>
+                </a:solidFill>
+              </a:defRPr>
+            </a:pPr>
+            <a:r>
+              <a:t>核心：无私故能成其私</a:t>
+            </a:r>
+          </a:p>
           <a:p>
             <a:pPr>
-              <a:defRPr sz="1800" b="1">
-                <a:solidFill>
-                  <a:srgbClr val="502814"/>
-                </a:solidFill>
-              </a:defRPr>
-            </a:pPr>
-            <a:r>
-              <a:t>天长地久</a:t>
-            </a:r>
-          </a:p>
-        </p:txBody>
-      </p:sp>
-      <p:sp>
-        <p:nvSpPr>
-          <p:cNvPr id="9" name="TextBox 8"/>
-          <p:cNvSpPr txBox="1"/>
-          <p:nvPr/>
-        </p:nvSpPr>
-        <p:spPr>
-          <a:xfrm>
-            <a:off x="2286000" y="2"/>
-            <a:ext cx="6217920" cy="347472"/>
-          </a:xfrm>
-          <a:prstGeom prst="rect">
-            <a:avLst/>
-          </a:prstGeom>
-          <a:noFill/>
-        </p:spPr>
-        <p:txBody>
-          <a:bodyPr wrap="none">
-            <a:spAutoFit/>
-          </a:bodyPr>
-          <a:lstStyle/>
-          <a:p>
-            <a:pPr>
-              <a:defRPr sz="1300">
-                <a:solidFill>
-                  <a:srgbClr val="321E0F"/>
-                </a:solidFill>
-              </a:defRPr>
-            </a:pPr>
-            <a:r>
-              <a:t>核心：无私故能成其私</a:t>
-            </a:r>
-          </a:p>
-        </p:txBody>
-      </p:sp>
-      <p:sp>
-        <p:nvSpPr>
-          <p:cNvPr id="10" name="TextBox 9"/>
-          <p:cNvSpPr txBox="1"/>
-          <p:nvPr/>
-        </p:nvSpPr>
-        <p:spPr>
-          <a:xfrm>
-            <a:off x="2286000" y="2"/>
-            <a:ext cx="6217920" cy="347472"/>
-          </a:xfrm>
-          <a:prstGeom prst="rect">
-            <a:avLst/>
-          </a:prstGeom>
-          <a:noFill/>
-        </p:spPr>
-        <p:txBody>
-          <a:bodyPr wrap="none">
-            <a:spAutoFit/>
-          </a:bodyPr>
-          <a:lstStyle/>
-          <a:p>
-            <a:pPr>
-              <a:defRPr sz="1250" i="1">
-                <a:solidFill>
-                  <a:srgbClr val="B45A28"/>
-                </a:solidFill>
-              </a:defRPr>
-            </a:pPr>
-            <a:r>
-              <a:t>原文：后其身而身先</a:t>
-            </a:r>
-          </a:p>
-        </p:txBody>
-      </p:sp>
-      <p:sp>
-        <p:nvSpPr>
-          <p:cNvPr id="11" name="Rounded Rectangle 10"/>
+              <a:defRPr sz="1300" i="1">
+                <a:solidFill>
+                  <a:srgbClr val="4682B4"/>
+                </a:solidFill>
+              </a:defRPr>
+            </a:pPr>
+            <a:r>
+              <a:t>原文：后其身而身先，外其身而身存</a:t>
+            </a:r>
+          </a:p>
+        </p:txBody>
+      </p:sp>
+      <p:sp>
+        <p:nvSpPr>
+          <p:cNvPr id="5" name="Rounded Rectangle 4"/>
           <p:cNvSpPr/>
           <p:nvPr/>
         </p:nvSpPr>
         <p:spPr>
           <a:xfrm>
-            <a:off x="457200" y="3"/>
-            <a:ext cx="8229600" cy="1280160"/>
+            <a:off x="457200" y="2743200"/>
+            <a:ext cx="8229600" cy="1371600"/>
           </a:xfrm>
           <a:prstGeom prst="roundRect">
             <a:avLst/>
           </a:prstGeom>
           <a:solidFill>
-            <a:srgbClr val="F0E8DA"/>
+            <a:srgbClr val="F5F5F0"/>
           </a:solidFill>
-          <a:ln>
-            <a:solidFill>
-              <a:srgbClr val="C8A03C"/>
-            </a:solidFill>
-          </a:ln>
         </p:spPr>
         <p:style>
           <a:lnRef idx="1">
@@ -4102,144 +3921,37 @@
           </a:fontRef>
         </p:style>
         <p:txBody>
-          <a:bodyPr rtlCol="0" anchor="ctr"/>
-          <a:lstStyle/>
-          <a:p>
-            <a:pPr algn="ctr"/>
-          </a:p>
-        </p:txBody>
-      </p:sp>
-      <p:sp>
-        <p:nvSpPr>
-          <p:cNvPr id="12" name="TextBox 11"/>
-          <p:cNvSpPr txBox="1"/>
-          <p:nvPr/>
-        </p:nvSpPr>
-        <p:spPr>
-          <a:xfrm>
-            <a:off x="640080" y="3"/>
-            <a:ext cx="1828800" cy="365760"/>
-          </a:xfrm>
-          <a:prstGeom prst="rect">
-            <a:avLst/>
-          </a:prstGeom>
-          <a:noFill/>
-        </p:spPr>
-        <p:txBody>
-          <a:bodyPr wrap="none">
-            <a:spAutoFit/>
-          </a:bodyPr>
-          <a:lstStyle/>
+          <a:bodyPr rtlCol="0" anchor="ctr" wrap="square"/>
+          <a:lstStyle/>
+          <a:p>
+            <a:pPr algn="ctr">
+              <a:defRPr sz="1800" b="1">
+                <a:solidFill>
+                  <a:srgbClr val="1E3C72"/>
+                </a:solidFill>
+              </a:defRPr>
+            </a:pPr>
+            <a:r>
+              <a:t>第八章 · 上善若水</a:t>
+            </a:r>
+          </a:p>
           <a:p>
             <a:pPr>
-              <a:defRPr sz="1300" b="1">
-                <a:solidFill>
-                  <a:srgbClr val="B45A28"/>
-                </a:solidFill>
-              </a:defRPr>
-            </a:pPr>
-            <a:r>
-              <a:t>第8章</a:t>
-            </a:r>
-          </a:p>
-        </p:txBody>
-      </p:sp>
-      <p:sp>
-        <p:nvSpPr>
-          <p:cNvPr id="13" name="TextBox 12"/>
-          <p:cNvSpPr txBox="1"/>
-          <p:nvPr/>
-        </p:nvSpPr>
-        <p:spPr>
-          <a:xfrm>
-            <a:off x="2286000" y="3"/>
-            <a:ext cx="6217920" cy="411480"/>
-          </a:xfrm>
-          <a:prstGeom prst="rect">
-            <a:avLst/>
-          </a:prstGeom>
-          <a:noFill/>
-        </p:spPr>
-        <p:txBody>
-          <a:bodyPr wrap="none">
-            <a:spAutoFit/>
-          </a:bodyPr>
-          <a:lstStyle/>
+              <a:defRPr sz="1400">
+                <a:solidFill>
+                  <a:srgbClr val="333333"/>
+                </a:solidFill>
+              </a:defRPr>
+            </a:pPr>
+            <a:r>
+              <a:t>核心：不争故无尤</a:t>
+            </a:r>
+          </a:p>
           <a:p>
             <a:pPr>
-              <a:defRPr sz="1800" b="1">
-                <a:solidFill>
-                  <a:srgbClr val="502814"/>
-                </a:solidFill>
-              </a:defRPr>
-            </a:pPr>
-            <a:r>
-              <a:t>上善若水</a:t>
-            </a:r>
-          </a:p>
-        </p:txBody>
-      </p:sp>
-      <p:sp>
-        <p:nvSpPr>
-          <p:cNvPr id="14" name="TextBox 13"/>
-          <p:cNvSpPr txBox="1"/>
-          <p:nvPr/>
-        </p:nvSpPr>
-        <p:spPr>
-          <a:xfrm>
-            <a:off x="2286000" y="3"/>
-            <a:ext cx="6217920" cy="347472"/>
-          </a:xfrm>
-          <a:prstGeom prst="rect">
-            <a:avLst/>
-          </a:prstGeom>
-          <a:noFill/>
-        </p:spPr>
-        <p:txBody>
-          <a:bodyPr wrap="none">
-            <a:spAutoFit/>
-          </a:bodyPr>
-          <a:lstStyle/>
-          <a:p>
-            <a:pPr>
-              <a:defRPr sz="1300">
-                <a:solidFill>
-                  <a:srgbClr val="321E0F"/>
-                </a:solidFill>
-              </a:defRPr>
-            </a:pPr>
-            <a:r>
-              <a:t>核心：不争故无尤</a:t>
-            </a:r>
-          </a:p>
-        </p:txBody>
-      </p:sp>
-      <p:sp>
-        <p:nvSpPr>
-          <p:cNvPr id="15" name="TextBox 14"/>
-          <p:cNvSpPr txBox="1"/>
-          <p:nvPr/>
-        </p:nvSpPr>
-        <p:spPr>
-          <a:xfrm>
-            <a:off x="2286000" y="4"/>
-            <a:ext cx="6217920" cy="347472"/>
-          </a:xfrm>
-          <a:prstGeom prst="rect">
-            <a:avLst/>
-          </a:prstGeom>
-          <a:noFill/>
-        </p:spPr>
-        <p:txBody>
-          <a:bodyPr wrap="none">
-            <a:spAutoFit/>
-          </a:bodyPr>
-          <a:lstStyle/>
-          <a:p>
-            <a:pPr>
-              <a:defRPr sz="1250" i="1">
-                <a:solidFill>
-                  <a:srgbClr val="B45A28"/>
+              <a:defRPr sz="1300" i="1">
+                <a:solidFill>
+                  <a:srgbClr val="4682B4"/>
                 </a:solidFill>
               </a:defRPr>
             </a:pPr>
@@ -4251,26 +3963,21 @@
       </p:sp>
       <p:sp>
         <p:nvSpPr>
-          <p:cNvPr id="16" name="Rounded Rectangle 15"/>
+          <p:cNvPr id="6" name="Rounded Rectangle 5"/>
           <p:cNvSpPr/>
           <p:nvPr/>
         </p:nvSpPr>
         <p:spPr>
           <a:xfrm>
-            <a:off x="457200" y="4"/>
-            <a:ext cx="8229600" cy="1280160"/>
+            <a:off x="457200" y="4206240"/>
+            <a:ext cx="8229600" cy="1371600"/>
           </a:xfrm>
           <a:prstGeom prst="roundRect">
             <a:avLst/>
           </a:prstGeom>
           <a:solidFill>
-            <a:srgbClr val="F0E8DA"/>
+            <a:srgbClr val="F5F5F0"/>
           </a:solidFill>
-          <a:ln>
-            <a:solidFill>
-              <a:srgbClr val="C8A03C"/>
-            </a:solidFill>
-          </a:ln>
         </p:spPr>
         <p:style>
           <a:lnRef idx="1">
@@ -4287,23 +3994,56 @@
           </a:fontRef>
         </p:style>
         <p:txBody>
-          <a:bodyPr rtlCol="0" anchor="ctr"/>
-          <a:lstStyle/>
-          <a:p>
-            <a:pPr algn="ctr"/>
-          </a:p>
-        </p:txBody>
-      </p:sp>
-      <p:sp>
-        <p:nvSpPr>
-          <p:cNvPr id="17" name="TextBox 16"/>
+          <a:bodyPr rtlCol="0" anchor="ctr" wrap="square"/>
+          <a:lstStyle/>
+          <a:p>
+            <a:pPr algn="ctr">
+              <a:defRPr sz="1800" b="1">
+                <a:solidFill>
+                  <a:srgbClr val="1E3C72"/>
+                </a:solidFill>
+              </a:defRPr>
+            </a:pPr>
+            <a:r>
+              <a:t>第九章 · 功遂身退</a:t>
+            </a:r>
+          </a:p>
+          <a:p>
+            <a:pPr>
+              <a:defRPr sz="1400">
+                <a:solidFill>
+                  <a:srgbClr val="333333"/>
+                </a:solidFill>
+              </a:defRPr>
+            </a:pPr>
+            <a:r>
+              <a:t>核心：功成身退天之道</a:t>
+            </a:r>
+          </a:p>
+          <a:p>
+            <a:pPr>
+              <a:defRPr sz="1300" i="1">
+                <a:solidFill>
+                  <a:srgbClr val="4682B4"/>
+                </a:solidFill>
+              </a:defRPr>
+            </a:pPr>
+            <a:r>
+              <a:t>原文：持而盈之不如其已</a:t>
+            </a:r>
+          </a:p>
+        </p:txBody>
+      </p:sp>
+      <p:sp>
+        <p:nvSpPr>
+          <p:cNvPr id="7" name="TextBox 6"/>
           <p:cNvSpPr txBox="1"/>
           <p:nvPr/>
         </p:nvSpPr>
         <p:spPr>
           <a:xfrm>
-            <a:off x="640080" y="4"/>
-            <a:ext cx="1828800" cy="365760"/>
+            <a:off x="8229600" y="6400800"/>
+            <a:ext cx="731520" cy="274320"/>
           </a:xfrm>
           <a:prstGeom prst="rect">
             <a:avLst/>
@@ -4316,120 +4056,15 @@
           </a:bodyPr>
           <a:lstStyle/>
           <a:p>
-            <a:pPr>
-              <a:defRPr sz="1300" b="1">
-                <a:solidFill>
-                  <a:srgbClr val="B45A28"/>
-                </a:solidFill>
-              </a:defRPr>
-            </a:pPr>
-            <a:r>
-              <a:t>第9章</a:t>
-            </a:r>
-          </a:p>
-        </p:txBody>
-      </p:sp>
-      <p:sp>
-        <p:nvSpPr>
-          <p:cNvPr id="18" name="TextBox 17"/>
-          <p:cNvSpPr txBox="1"/>
-          <p:nvPr/>
-        </p:nvSpPr>
-        <p:spPr>
-          <a:xfrm>
-            <a:off x="2286000" y="4"/>
-            <a:ext cx="6217920" cy="411480"/>
-          </a:xfrm>
-          <a:prstGeom prst="rect">
-            <a:avLst/>
-          </a:prstGeom>
-          <a:noFill/>
-        </p:spPr>
-        <p:txBody>
-          <a:bodyPr wrap="none">
-            <a:spAutoFit/>
-          </a:bodyPr>
-          <a:lstStyle/>
-          <a:p>
-            <a:pPr>
-              <a:defRPr sz="1800" b="1">
-                <a:solidFill>
-                  <a:srgbClr val="502814"/>
-                </a:solidFill>
-              </a:defRPr>
-            </a:pPr>
-            <a:r>
-              <a:t>功遂身退</a:t>
-            </a:r>
-          </a:p>
-        </p:txBody>
-      </p:sp>
-      <p:sp>
-        <p:nvSpPr>
-          <p:cNvPr id="19" name="TextBox 18"/>
-          <p:cNvSpPr txBox="1"/>
-          <p:nvPr/>
-        </p:nvSpPr>
-        <p:spPr>
-          <a:xfrm>
-            <a:off x="2286000" y="5"/>
-            <a:ext cx="6217920" cy="347472"/>
-          </a:xfrm>
-          <a:prstGeom prst="rect">
-            <a:avLst/>
-          </a:prstGeom>
-          <a:noFill/>
-        </p:spPr>
-        <p:txBody>
-          <a:bodyPr wrap="none">
-            <a:spAutoFit/>
-          </a:bodyPr>
-          <a:lstStyle/>
-          <a:p>
-            <a:pPr>
-              <a:defRPr sz="1300">
-                <a:solidFill>
-                  <a:srgbClr val="321E0F"/>
-                </a:solidFill>
-              </a:defRPr>
-            </a:pPr>
-            <a:r>
-              <a:t>核心：功成身退天之道</a:t>
-            </a:r>
-          </a:p>
-        </p:txBody>
-      </p:sp>
-      <p:sp>
-        <p:nvSpPr>
-          <p:cNvPr id="20" name="TextBox 19"/>
-          <p:cNvSpPr txBox="1"/>
-          <p:nvPr/>
-        </p:nvSpPr>
-        <p:spPr>
-          <a:xfrm>
-            <a:off x="2286000" y="5"/>
-            <a:ext cx="6217920" cy="347472"/>
-          </a:xfrm>
-          <a:prstGeom prst="rect">
-            <a:avLst/>
-          </a:prstGeom>
-          <a:noFill/>
-        </p:spPr>
-        <p:txBody>
-          <a:bodyPr wrap="none">
-            <a:spAutoFit/>
-          </a:bodyPr>
-          <a:lstStyle/>
-          <a:p>
-            <a:pPr>
-              <a:defRPr sz="1250" i="1">
-                <a:solidFill>
-                  <a:srgbClr val="B45A28"/>
-                </a:solidFill>
-              </a:defRPr>
-            </a:pPr>
-            <a:r>
-              <a:t>原文：持而盈之不如其已</a:t>
+            <a:pPr algn="r">
+              <a:defRPr sz="1000">
+                <a:solidFill>
+                  <a:srgbClr val="969696"/>
+                </a:solidFill>
+              </a:defRPr>
+            </a:pPr>
+            <a:r>
+              <a:t>11/12</a:t>
             </a:r>
           </a:p>
         </p:txBody>
@@ -4445,14 +4080,6 @@
 <file path=ppt/slides/slide12.xml><?xml version="1.0" encoding="utf-8"?>
 <p:sld xmlns:a="http://schemas.openxmlformats.org/drawingml/2006/main" xmlns:p="http://schemas.openxmlformats.org/presentationml/2006/main" xmlns:r="http://schemas.openxmlformats.org/officeDocument/2006/relationships">
   <p:cSld>
-    <p:bg>
-      <p:bgPr>
-        <a:solidFill>
-          <a:srgbClr val="FCF8EE"/>
-        </a:solidFill>
-        <a:effectLst/>
-      </p:bgPr>
-    </p:bg>
     <p:spTree>
       <p:nvGrpSpPr>
         <p:cNvPr id="1" name=""/>
@@ -4468,14 +4095,14 @@
         </p:nvSpPr>
         <p:spPr>
           <a:xfrm>
-            <a:off x="1371600" y="2560320"/>
-            <a:ext cx="6400800" cy="36576"/>
+            <a:off x="0" y="0"/>
+            <a:ext cx="9144000" cy="1097280"/>
           </a:xfrm>
           <a:prstGeom prst="rect">
             <a:avLst/>
           </a:prstGeom>
           <a:solidFill>
-            <a:srgbClr val="C8A03C"/>
+            <a:srgbClr val="1E3C72"/>
           </a:solidFill>
           <a:ln>
             <a:noFill/>
@@ -4511,8 +4138,8 @@
         </p:nvSpPr>
         <p:spPr>
           <a:xfrm>
-            <a:off x="457200" y="2743200"/>
-            <a:ext cx="8229600" cy="1097280"/>
+            <a:off x="457200" y="228600"/>
+            <a:ext cx="8229600" cy="731520"/>
           </a:xfrm>
           <a:prstGeom prst="rect">
             <a:avLst/>
@@ -4520,15 +4147,15 @@
           <a:noFill/>
         </p:spPr>
         <p:txBody>
-          <a:bodyPr wrap="square">
+          <a:bodyPr wrap="none">
             <a:spAutoFit/>
           </a:bodyPr>
           <a:lstStyle/>
           <a:p>
-            <a:pPr algn="ctr">
-              <a:defRPr sz="4000" b="1">
-                <a:solidFill>
-                  <a:srgbClr val="502814"/>
+            <a:pPr>
+              <a:defRPr sz="3200" b="1">
+                <a:solidFill>
+                  <a:srgbClr val="FFFFFF"/>
                 </a:solidFill>
               </a:defRPr>
             </a:pPr>
@@ -4536,43 +4163,25 @@
               <a:t>第7-9章 · 学习完成</a:t>
             </a:r>
           </a:p>
-          <a:p>
-            <a:pPr algn="ctr">
-              <a:spcBef>
-                <a:spcPts val="1400"/>
-              </a:spcBef>
-              <a:defRPr sz="2000">
-                <a:solidFill>
-                  <a:srgbClr val="B45A28"/>
-                </a:solidFill>
-              </a:defRPr>
-            </a:pPr>
-            <a:r>
-              <a:t>天长地久 · 上善若水 · 功遂身退</a:t>
-            </a:r>
-          </a:p>
-        </p:txBody>
-      </p:sp>
-      <p:sp>
-        <p:nvSpPr>
-          <p:cNvPr id="4" name="Rectangle 3"/>
+        </p:txBody>
+      </p:sp>
+      <p:sp>
+        <p:nvSpPr>
+          <p:cNvPr id="4" name="Rounded Rectangle 3"/>
           <p:cNvSpPr/>
           <p:nvPr/>
         </p:nvSpPr>
         <p:spPr>
           <a:xfrm>
-            <a:off x="1371600" y="4114800"/>
-            <a:ext cx="6400800" cy="36576"/>
-          </a:xfrm>
-          <a:prstGeom prst="rect">
+            <a:off x="1371600" y="2286000"/>
+            <a:ext cx="6400800" cy="1828800"/>
+          </a:xfrm>
+          <a:prstGeom prst="roundRect">
             <a:avLst/>
           </a:prstGeom>
           <a:solidFill>
-            <a:srgbClr val="C8A03C"/>
+            <a:srgbClr val="F5F5F0"/>
           </a:solidFill>
-          <a:ln>
-            <a:noFill/>
-          </a:ln>
         </p:spPr>
         <p:style>
           <a:lnRef idx="1">
@@ -4589,10 +4198,31 @@
           </a:fontRef>
         </p:style>
         <p:txBody>
-          <a:bodyPr rtlCol="0" anchor="ctr"/>
-          <a:lstStyle/>
-          <a:p>
-            <a:pPr algn="ctr"/>
+          <a:bodyPr rtlCol="0" anchor="ctr" wrap="square"/>
+          <a:lstStyle/>
+          <a:p>
+            <a:pPr algn="ctr">
+              <a:defRPr sz="2200" i="1">
+                <a:solidFill>
+                  <a:srgbClr val="1E3C72"/>
+                </a:solidFill>
+              </a:defRPr>
+            </a:pPr>
+            <a:r>
+              <a:t>「知足者富，强行者有志。</a:t>
+            </a:r>
+          </a:p>
+          <a:p>
+            <a:pPr algn="ctr">
+              <a:defRPr sz="2200" i="1">
+                <a:solidFill>
+                  <a:srgbClr val="1E3C72"/>
+                </a:solidFill>
+              </a:defRPr>
+            </a:pPr>
+            <a:r>
+              <a:t>不失其所者久，死而不亡者寿。」</a:t>
+            </a:r>
           </a:p>
         </p:txBody>
       </p:sp>
@@ -4604,43 +4234,8 @@
         </p:nvSpPr>
         <p:spPr>
           <a:xfrm>
-            <a:off x="914400" y="4389120"/>
-            <a:ext cx="7315200" cy="1097280"/>
-          </a:xfrm>
-          <a:prstGeom prst="rect">
-            <a:avLst/>
-          </a:prstGeom>
-          <a:noFill/>
-        </p:spPr>
-        <p:txBody>
-          <a:bodyPr wrap="square">
-            <a:spAutoFit/>
-          </a:bodyPr>
-          <a:lstStyle/>
-          <a:p>
-            <a:pPr algn="ctr">
-              <a:defRPr sz="1600" i="1">
-                <a:solidFill>
-                  <a:srgbClr val="B45A28"/>
-                </a:solidFill>
-              </a:defRPr>
-            </a:pPr>
-            <a:r>
-              <a:t>「知足者富，强行者有志。不失其所者久，死而不亡者寿。」</a:t>
-            </a:r>
-          </a:p>
-        </p:txBody>
-      </p:sp>
-      <p:sp>
-        <p:nvSpPr>
-          <p:cNvPr id="6" name="TextBox 5"/>
-          <p:cNvSpPr txBox="1"/>
-          <p:nvPr/>
-        </p:nvSpPr>
-        <p:spPr>
-          <a:xfrm>
-            <a:off x="0" y="6400800"/>
-            <a:ext cx="9144000" cy="365760"/>
+            <a:off x="914400" y="4572000"/>
+            <a:ext cx="7315200" cy="914400"/>
           </a:xfrm>
           <a:prstGeom prst="rect">
             <a:avLst/>
@@ -4654,14 +4249,49 @@
           <a:lstStyle/>
           <a:p>
             <a:pPr algn="ctr">
+              <a:defRPr sz="2400">
+                <a:solidFill>
+                  <a:srgbClr val="4682B4"/>
+                </a:solidFill>
+              </a:defRPr>
+            </a:pPr>
+            <a:r>
+              <a:t>天长地久 · 上善若水 · 功遂身退</a:t>
+            </a:r>
+          </a:p>
+        </p:txBody>
+      </p:sp>
+      <p:sp>
+        <p:nvSpPr>
+          <p:cNvPr id="6" name="TextBox 5"/>
+          <p:cNvSpPr txBox="1"/>
+          <p:nvPr/>
+        </p:nvSpPr>
+        <p:spPr>
+          <a:xfrm>
+            <a:off x="8229600" y="6400800"/>
+            <a:ext cx="731520" cy="274320"/>
+          </a:xfrm>
+          <a:prstGeom prst="rect">
+            <a:avLst/>
+          </a:prstGeom>
+          <a:noFill/>
+        </p:spPr>
+        <p:txBody>
+          <a:bodyPr wrap="none">
+            <a:spAutoFit/>
+          </a:bodyPr>
+          <a:lstStyle/>
+          <a:p>
+            <a:pPr algn="r">
               <a:defRPr sz="1000">
                 <a:solidFill>
-                  <a:srgbClr val="B45A28"/>
-                </a:solidFill>
-              </a:defRPr>
-            </a:pPr>
-            <a:r>
-              <a:t>《道德经》打卡学习 · 小燕子 🐦</a:t>
+                  <a:srgbClr val="969696"/>
+                </a:solidFill>
+              </a:defRPr>
+            </a:pPr>
+            <a:r>
+              <a:t>12/12</a:t>
             </a:r>
           </a:p>
         </p:txBody>
@@ -4677,14 +4307,6 @@
 <file path=ppt/slides/slide2.xml><?xml version="1.0" encoding="utf-8"?>
 <p:sld xmlns:a="http://schemas.openxmlformats.org/drawingml/2006/main" xmlns:p="http://schemas.openxmlformats.org/presentationml/2006/main" xmlns:r="http://schemas.openxmlformats.org/officeDocument/2006/relationships">
   <p:cSld>
-    <p:bg>
-      <p:bgPr>
-        <a:solidFill>
-          <a:srgbClr val="FCF8EE"/>
-        </a:solidFill>
-        <a:effectLst/>
-      </p:bgPr>
-    </p:bg>
     <p:spTree>
       <p:nvGrpSpPr>
         <p:cNvPr id="1" name=""/>
@@ -4701,13 +4323,13 @@
         <p:spPr>
           <a:xfrm>
             <a:off x="0" y="0"/>
-            <a:ext cx="9144000" cy="1188720"/>
+            <a:ext cx="9144000" cy="1097280"/>
           </a:xfrm>
           <a:prstGeom prst="rect">
             <a:avLst/>
           </a:prstGeom>
           <a:solidFill>
-            <a:srgbClr val="502814"/>
+            <a:srgbClr val="1E3C72"/>
           </a:solidFill>
           <a:ln>
             <a:noFill/>
@@ -4743,8 +4365,8 @@
         </p:nvSpPr>
         <p:spPr>
           <a:xfrm>
-            <a:off x="457200" y="73152"/>
-            <a:ext cx="8229600" cy="411480"/>
+            <a:off x="457200" y="228600"/>
+            <a:ext cx="8229600" cy="731520"/>
           </a:xfrm>
           <a:prstGeom prst="rect">
             <a:avLst/>
@@ -4758,110 +4380,35 @@
           <a:lstStyle/>
           <a:p>
             <a:pPr>
-              <a:defRPr sz="1300">
-                <a:solidFill>
-                  <a:srgbClr val="C8A03C"/>
-                </a:solidFill>
-              </a:defRPr>
-            </a:pPr>
-            <a:r>
-              <a:t>Chapter 7</a:t>
-            </a:r>
-          </a:p>
-        </p:txBody>
-      </p:sp>
-      <p:sp>
-        <p:nvSpPr>
-          <p:cNvPr id="4" name="TextBox 3"/>
-          <p:cNvSpPr txBox="1"/>
-          <p:nvPr/>
-        </p:nvSpPr>
-        <p:spPr>
-          <a:xfrm>
-            <a:off x="457200" y="347472"/>
-            <a:ext cx="8229600" cy="685800"/>
-          </a:xfrm>
-          <a:prstGeom prst="rect">
-            <a:avLst/>
-          </a:prstGeom>
-          <a:noFill/>
-        </p:spPr>
-        <p:txBody>
-          <a:bodyPr wrap="none">
-            <a:spAutoFit/>
-          </a:bodyPr>
-          <a:lstStyle/>
-          <a:p>
-            <a:pPr>
-              <a:defRPr sz="2600" b="1">
+              <a:defRPr sz="3200" b="1">
                 <a:solidFill>
                   <a:srgbClr val="FFFFFF"/>
                 </a:solidFill>
               </a:defRPr>
             </a:pPr>
             <a:r>
-              <a:t>第7章 · 天长地久</a:t>
-            </a:r>
-          </a:p>
-        </p:txBody>
-      </p:sp>
-      <p:sp>
-        <p:nvSpPr>
-          <p:cNvPr id="5" name="TextBox 4"/>
-          <p:cNvSpPr txBox="1"/>
-          <p:nvPr/>
-        </p:nvSpPr>
-        <p:spPr>
-          <a:xfrm>
-            <a:off x="0" y="6400800"/>
-            <a:ext cx="9144000" cy="365760"/>
-          </a:xfrm>
-          <a:prstGeom prst="rect">
-            <a:avLst/>
-          </a:prstGeom>
-          <a:noFill/>
-        </p:spPr>
-        <p:txBody>
-          <a:bodyPr wrap="none">
-            <a:spAutoFit/>
-          </a:bodyPr>
-          <a:lstStyle/>
-          <a:p>
-            <a:pPr algn="ctr">
-              <a:defRPr sz="1000">
-                <a:solidFill>
-                  <a:srgbClr val="B45A28"/>
-                </a:solidFill>
-              </a:defRPr>
-            </a:pPr>
-            <a:r>
-              <a:t>《道德经》打卡学习 · 小燕子 🐦</a:t>
-            </a:r>
-          </a:p>
-        </p:txBody>
-      </p:sp>
-      <p:sp>
-        <p:nvSpPr>
-          <p:cNvPr id="6" name="Rounded Rectangle 5"/>
+              <a:t>第七章 · 天长地久</a:t>
+            </a:r>
+          </a:p>
+        </p:txBody>
+      </p:sp>
+      <p:sp>
+        <p:nvSpPr>
+          <p:cNvPr id="4" name="Rounded Rectangle 3"/>
           <p:cNvSpPr/>
           <p:nvPr/>
         </p:nvSpPr>
         <p:spPr>
           <a:xfrm>
-            <a:off x="457200" y="1371600"/>
-            <a:ext cx="8229600" cy="1463040"/>
+            <a:off x="457200" y="1280160"/>
+            <a:ext cx="8229600" cy="2011680"/>
           </a:xfrm>
           <a:prstGeom prst="roundRect">
             <a:avLst/>
           </a:prstGeom>
           <a:solidFill>
-            <a:srgbClr val="F0E8DA"/>
+            <a:srgbClr val="F5F5F0"/>
           </a:solidFill>
-          <a:ln>
-            <a:solidFill>
-              <a:srgbClr val="C8A03C"/>
-            </a:solidFill>
-          </a:ln>
         </p:spPr>
         <p:style>
           <a:lnRef idx="1">
@@ -4878,23 +4425,77 @@
           </a:fontRef>
         </p:style>
         <p:txBody>
-          <a:bodyPr rtlCol="0" anchor="ctr"/>
-          <a:lstStyle/>
-          <a:p>
-            <a:pPr algn="ctr"/>
-          </a:p>
-        </p:txBody>
-      </p:sp>
-      <p:sp>
-        <p:nvSpPr>
-          <p:cNvPr id="7" name="TextBox 6"/>
+          <a:bodyPr rtlCol="0" anchor="ctr" wrap="square"/>
+          <a:lstStyle/>
+          <a:p>
+            <a:pPr algn="ctr">
+              <a:defRPr sz="1800" b="1">
+                <a:solidFill>
+                  <a:srgbClr val="1E3C72"/>
+                </a:solidFill>
+              </a:defRPr>
+            </a:pPr>
+            <a:r>
+              <a:t>【原文】</a:t>
+            </a:r>
+          </a:p>
+          <a:p>
+            <a:pPr>
+              <a:spcBef>
+                <a:spcPts val="400"/>
+              </a:spcBef>
+              <a:defRPr sz="1800">
+                <a:solidFill>
+                  <a:srgbClr val="333333"/>
+                </a:solidFill>
+              </a:defRPr>
+            </a:pPr>
+            <a:r>
+              <a:t>天长地久。天地所以能长且久者，以其不自生，故能长生。</a:t>
+            </a:r>
+          </a:p>
+          <a:p>
+            <a:pPr>
+              <a:spcBef>
+                <a:spcPts val="400"/>
+              </a:spcBef>
+              <a:defRPr sz="1800">
+                <a:solidFill>
+                  <a:srgbClr val="333333"/>
+                </a:solidFill>
+              </a:defRPr>
+            </a:pPr>
+            <a:r>
+              <a:t>是以圣人后其身而身先，外其身而身存。</a:t>
+            </a:r>
+          </a:p>
+          <a:p>
+            <a:pPr>
+              <a:spcBef>
+                <a:spcPts val="400"/>
+              </a:spcBef>
+              <a:defRPr sz="1800">
+                <a:solidFill>
+                  <a:srgbClr val="333333"/>
+                </a:solidFill>
+              </a:defRPr>
+            </a:pPr>
+            <a:r>
+              <a:t>非以其无私邪？故能成其私。</a:t>
+            </a:r>
+          </a:p>
+        </p:txBody>
+      </p:sp>
+      <p:sp>
+        <p:nvSpPr>
+          <p:cNvPr id="5" name="TextBox 4"/>
           <p:cNvSpPr txBox="1"/>
           <p:nvPr/>
         </p:nvSpPr>
         <p:spPr>
           <a:xfrm>
-            <a:off x="731520" y="1463040"/>
-            <a:ext cx="7680960" cy="1280160"/>
+            <a:off x="457200" y="3474720"/>
+            <a:ext cx="8229600" cy="3200400"/>
           </a:xfrm>
           <a:prstGeom prst="rect">
             <a:avLst/>
@@ -4908,28 +4509,73 @@
           <a:lstStyle/>
           <a:p>
             <a:pPr>
-              <a:defRPr sz="1500">
-                <a:solidFill>
-                  <a:srgbClr val="502814"/>
-                </a:solidFill>
-              </a:defRPr>
-            </a:pPr>
-            <a:r>
-              <a:t>天长地久。天地所以能长且久者，以其不自生，故能长生。是以圣人后其身而身先，外其身而身存。非以其无私邪？故能成其私。</a:t>
-            </a:r>
-          </a:p>
-        </p:txBody>
-      </p:sp>
-      <p:sp>
-        <p:nvSpPr>
-          <p:cNvPr id="8" name="TextBox 7"/>
+              <a:defRPr sz="1800" b="1">
+                <a:solidFill>
+                  <a:srgbClr val="1E3C72"/>
+                </a:solidFill>
+              </a:defRPr>
+            </a:pPr>
+            <a:r>
+              <a:t>【白话解读】</a:t>
+            </a:r>
+          </a:p>
+          <a:p>
+            <a:pPr>
+              <a:spcBef>
+                <a:spcPts val="600"/>
+              </a:spcBef>
+              <a:defRPr sz="1400">
+                <a:solidFill>
+                  <a:srgbClr val="333333"/>
+                </a:solidFill>
+              </a:defRPr>
+            </a:pPr>
+            <a:r>
+              <a:t>• 天地之道：天地之所以永恒存在，是因为它们不为自己而运作，故能长生。</a:t>
+            </a:r>
+          </a:p>
+          <a:p>
+            <a:pPr>
+              <a:spcBef>
+                <a:spcPts val="600"/>
+              </a:spcBef>
+              <a:defRPr sz="1400">
+                <a:solidFill>
+                  <a:srgbClr val="333333"/>
+                </a:solidFill>
+              </a:defRPr>
+            </a:pPr>
+            <a:r>
+              <a:t>• 圣人之道：圣人把自己放在最后，反而居于前列；置身度外，反而保全自身。</a:t>
+            </a:r>
+          </a:p>
+          <a:p>
+            <a:pPr>
+              <a:spcBef>
+                <a:spcPts val="600"/>
+              </a:spcBef>
+              <a:defRPr sz="1400">
+                <a:solidFill>
+                  <a:srgbClr val="333333"/>
+                </a:solidFill>
+              </a:defRPr>
+            </a:pPr>
+            <a:r>
+              <a:t>• 核心智慧：正因为无私，反而成就了自己——看似矛盾，实为天道。</a:t>
+            </a:r>
+          </a:p>
+        </p:txBody>
+      </p:sp>
+      <p:sp>
+        <p:nvSpPr>
+          <p:cNvPr id="6" name="TextBox 5"/>
           <p:cNvSpPr txBox="1"/>
           <p:nvPr/>
         </p:nvSpPr>
         <p:spPr>
           <a:xfrm>
-            <a:off x="731520" y="3"/>
-            <a:ext cx="7680960" cy="640080"/>
+            <a:off x="8229600" y="6400800"/>
+            <a:ext cx="731520" cy="274320"/>
           </a:xfrm>
           <a:prstGeom prst="rect">
             <a:avLst/>
@@ -4937,90 +4583,20 @@
           <a:noFill/>
         </p:spPr>
         <p:txBody>
-          <a:bodyPr wrap="square">
+          <a:bodyPr wrap="none">
             <a:spAutoFit/>
           </a:bodyPr>
           <a:lstStyle/>
           <a:p>
-            <a:pPr>
-              <a:defRPr sz="1400">
-                <a:solidFill>
-                  <a:srgbClr val="321E0F"/>
-                </a:solidFill>
-              </a:defRPr>
-            </a:pPr>
-            <a:r>
-              <a:t>📜 天地之所以永恒存在，是因为它们不为自己而运作，故能长生。</a:t>
-            </a:r>
-          </a:p>
-        </p:txBody>
-      </p:sp>
-      <p:sp>
-        <p:nvSpPr>
-          <p:cNvPr id="9" name="TextBox 8"/>
-          <p:cNvSpPr txBox="1"/>
-          <p:nvPr/>
-        </p:nvSpPr>
-        <p:spPr>
-          <a:xfrm>
-            <a:off x="731520" y="4"/>
-            <a:ext cx="7680960" cy="640080"/>
-          </a:xfrm>
-          <a:prstGeom prst="rect">
-            <a:avLst/>
-          </a:prstGeom>
-          <a:noFill/>
-        </p:spPr>
-        <p:txBody>
-          <a:bodyPr wrap="square">
-            <a:spAutoFit/>
-          </a:bodyPr>
-          <a:lstStyle/>
-          <a:p>
-            <a:pPr>
-              <a:defRPr sz="1400">
-                <a:solidFill>
-                  <a:srgbClr val="321E0F"/>
-                </a:solidFill>
-              </a:defRPr>
-            </a:pPr>
-            <a:r>
-              <a:t>📜 圣人把自己放在最后，反而居于前列；置身度外，反而保全自身。</a:t>
-            </a:r>
-          </a:p>
-        </p:txBody>
-      </p:sp>
-      <p:sp>
-        <p:nvSpPr>
-          <p:cNvPr id="10" name="TextBox 9"/>
-          <p:cNvSpPr txBox="1"/>
-          <p:nvPr/>
-        </p:nvSpPr>
-        <p:spPr>
-          <a:xfrm>
-            <a:off x="731520" y="5"/>
-            <a:ext cx="7680960" cy="640080"/>
-          </a:xfrm>
-          <a:prstGeom prst="rect">
-            <a:avLst/>
-          </a:prstGeom>
-          <a:noFill/>
-        </p:spPr>
-        <p:txBody>
-          <a:bodyPr wrap="square">
-            <a:spAutoFit/>
-          </a:bodyPr>
-          <a:lstStyle/>
-          <a:p>
-            <a:pPr>
-              <a:defRPr sz="1400">
-                <a:solidFill>
-                  <a:srgbClr val="321E0F"/>
-                </a:solidFill>
-              </a:defRPr>
-            </a:pPr>
-            <a:r>
-              <a:t>📜 正因为无私，反而成就了自己——看似矛盾，实为天道。</a:t>
+            <a:pPr algn="r">
+              <a:defRPr sz="1000">
+                <a:solidFill>
+                  <a:srgbClr val="969696"/>
+                </a:solidFill>
+              </a:defRPr>
+            </a:pPr>
+            <a:r>
+              <a:t>2/12</a:t>
             </a:r>
           </a:p>
         </p:txBody>
@@ -5036,14 +4612,6 @@
 <file path=ppt/slides/slide3.xml><?xml version="1.0" encoding="utf-8"?>
 <p:sld xmlns:a="http://schemas.openxmlformats.org/drawingml/2006/main" xmlns:p="http://schemas.openxmlformats.org/presentationml/2006/main" xmlns:r="http://schemas.openxmlformats.org/officeDocument/2006/relationships">
   <p:cSld>
-    <p:bg>
-      <p:bgPr>
-        <a:solidFill>
-          <a:srgbClr val="FCF8EE"/>
-        </a:solidFill>
-        <a:effectLst/>
-      </p:bgPr>
-    </p:bg>
     <p:spTree>
       <p:nvGrpSpPr>
         <p:cNvPr id="1" name=""/>
@@ -5060,13 +4628,13 @@
         <p:spPr>
           <a:xfrm>
             <a:off x="0" y="0"/>
-            <a:ext cx="9144000" cy="1188720"/>
+            <a:ext cx="9144000" cy="1097280"/>
           </a:xfrm>
           <a:prstGeom prst="rect">
             <a:avLst/>
           </a:prstGeom>
           <a:solidFill>
-            <a:srgbClr val="502814"/>
+            <a:srgbClr val="1E3C72"/>
           </a:solidFill>
           <a:ln>
             <a:noFill/>
@@ -5102,8 +4670,8 @@
         </p:nvSpPr>
         <p:spPr>
           <a:xfrm>
-            <a:off x="457200" y="73152"/>
-            <a:ext cx="8229600" cy="411480"/>
+            <a:off x="457200" y="228600"/>
+            <a:ext cx="8229600" cy="731520"/>
           </a:xfrm>
           <a:prstGeom prst="rect">
             <a:avLst/>
@@ -5117,28 +4685,211 @@
           <a:lstStyle/>
           <a:p>
             <a:pPr>
+              <a:defRPr sz="3200" b="1">
+                <a:solidFill>
+                  <a:srgbClr val="FFFFFF"/>
+                </a:solidFill>
+              </a:defRPr>
+            </a:pPr>
+            <a:r>
+              <a:t>第七章 · 典故与案例</a:t>
+            </a:r>
+          </a:p>
+        </p:txBody>
+      </p:sp>
+      <p:sp>
+        <p:nvSpPr>
+          <p:cNvPr id="4" name="Rounded Rectangle 3"/>
+          <p:cNvSpPr/>
+          <p:nvPr/>
+        </p:nvSpPr>
+        <p:spPr>
+          <a:xfrm>
+            <a:off x="457200" y="1280160"/>
+            <a:ext cx="8229600" cy="1371600"/>
+          </a:xfrm>
+          <a:prstGeom prst="roundRect">
+            <a:avLst/>
+          </a:prstGeom>
+          <a:solidFill>
+            <a:srgbClr val="F5F5F0"/>
+          </a:solidFill>
+        </p:spPr>
+        <p:style>
+          <a:lnRef idx="1">
+            <a:schemeClr val="accent1"/>
+          </a:lnRef>
+          <a:fillRef idx="3">
+            <a:schemeClr val="accent1"/>
+          </a:fillRef>
+          <a:effectRef idx="2">
+            <a:schemeClr val="accent1"/>
+          </a:effectRef>
+          <a:fontRef idx="minor">
+            <a:schemeClr val="lt1"/>
+          </a:fontRef>
+        </p:style>
+        <p:txBody>
+          <a:bodyPr rtlCol="0" anchor="ctr" wrap="square"/>
+          <a:lstStyle/>
+          <a:p>
+            <a:pPr algn="ctr">
+              <a:defRPr sz="1600" b="1">
+                <a:solidFill>
+                  <a:srgbClr val="1E3C72"/>
+                </a:solidFill>
+              </a:defRPr>
+            </a:pPr>
+            <a:r>
+              <a:t>【中国典故】范蠡三散财</a:t>
+            </a:r>
+          </a:p>
+          <a:p>
+            <a:pPr>
               <a:defRPr sz="1300">
                 <a:solidFill>
-                  <a:srgbClr val="C8A03C"/>
-                </a:solidFill>
-              </a:defRPr>
-            </a:pPr>
-            <a:r>
-              <a:t>Chapter 7 · Stories</a:t>
-            </a:r>
-          </a:p>
-        </p:txBody>
-      </p:sp>
-      <p:sp>
-        <p:nvSpPr>
-          <p:cNvPr id="4" name="TextBox 3"/>
+                  <a:srgbClr val="333333"/>
+                </a:solidFill>
+              </a:defRPr>
+            </a:pPr>
+            <a:r>
+              <a:t>春秋范蠡辅佐越王勾践灭吴后，主动隐退，散尽家财，泛舟五湖。后又白手起家成为巨富，被后人尊为'商圣'。正因不争功名，反而名垂千古。</a:t>
+            </a:r>
+          </a:p>
+        </p:txBody>
+      </p:sp>
+      <p:sp>
+        <p:nvSpPr>
+          <p:cNvPr id="5" name="Rounded Rectangle 4"/>
+          <p:cNvSpPr/>
+          <p:nvPr/>
+        </p:nvSpPr>
+        <p:spPr>
+          <a:xfrm>
+            <a:off x="457200" y="2743200"/>
+            <a:ext cx="8229600" cy="1371600"/>
+          </a:xfrm>
+          <a:prstGeom prst="roundRect">
+            <a:avLst/>
+          </a:prstGeom>
+          <a:solidFill>
+            <a:srgbClr val="F5F5F0"/>
+          </a:solidFill>
+        </p:spPr>
+        <p:style>
+          <a:lnRef idx="1">
+            <a:schemeClr val="accent1"/>
+          </a:lnRef>
+          <a:fillRef idx="3">
+            <a:schemeClr val="accent1"/>
+          </a:fillRef>
+          <a:effectRef idx="2">
+            <a:schemeClr val="accent1"/>
+          </a:effectRef>
+          <a:fontRef idx="minor">
+            <a:schemeClr val="lt1"/>
+          </a:fontRef>
+        </p:style>
+        <p:txBody>
+          <a:bodyPr rtlCol="0" anchor="ctr" wrap="square"/>
+          <a:lstStyle/>
+          <a:p>
+            <a:pPr algn="ctr">
+              <a:defRPr sz="1600" b="1">
+                <a:solidFill>
+                  <a:srgbClr val="1E3C72"/>
+                </a:solidFill>
+              </a:defRPr>
+            </a:pPr>
+            <a:r>
+              <a:t>【历史镜鉴】张良的智慧</a:t>
+            </a:r>
+          </a:p>
+          <a:p>
+            <a:pPr>
+              <a:defRPr sz="1300">
+                <a:solidFill>
+                  <a:srgbClr val="333333"/>
+                </a:solidFill>
+              </a:defRPr>
+            </a:pPr>
+            <a:r>
+              <a:t>张良运筹帷幄，助刘邦定天下功成名就后，选择辟谷修道，不恋权位。功成身退，保全自身与家族安稳。</a:t>
+            </a:r>
+          </a:p>
+        </p:txBody>
+      </p:sp>
+      <p:sp>
+        <p:nvSpPr>
+          <p:cNvPr id="6" name="Rounded Rectangle 5"/>
+          <p:cNvSpPr/>
+          <p:nvPr/>
+        </p:nvSpPr>
+        <p:spPr>
+          <a:xfrm>
+            <a:off x="457200" y="4206240"/>
+            <a:ext cx="8229600" cy="1371600"/>
+          </a:xfrm>
+          <a:prstGeom prst="roundRect">
+            <a:avLst/>
+          </a:prstGeom>
+          <a:solidFill>
+            <a:srgbClr val="F5F5F0"/>
+          </a:solidFill>
+        </p:spPr>
+        <p:style>
+          <a:lnRef idx="1">
+            <a:schemeClr val="accent1"/>
+          </a:lnRef>
+          <a:fillRef idx="3">
+            <a:schemeClr val="accent1"/>
+          </a:fillRef>
+          <a:effectRef idx="2">
+            <a:schemeClr val="accent1"/>
+          </a:effectRef>
+          <a:fontRef idx="minor">
+            <a:schemeClr val="lt1"/>
+          </a:fontRef>
+        </p:style>
+        <p:txBody>
+          <a:bodyPr rtlCol="0" anchor="ctr" wrap="square"/>
+          <a:lstStyle/>
+          <a:p>
+            <a:pPr algn="ctr">
+              <a:defRPr sz="1600" b="1">
+                <a:solidFill>
+                  <a:srgbClr val="1E3C72"/>
+                </a:solidFill>
+              </a:defRPr>
+            </a:pPr>
+            <a:r>
+              <a:t>【国外案例】华盛顿急流勇退</a:t>
+            </a:r>
+          </a:p>
+          <a:p>
+            <a:pPr>
+              <a:defRPr sz="1300">
+                <a:solidFill>
+                  <a:srgbClr val="333333"/>
+                </a:solidFill>
+              </a:defRPr>
+            </a:pPr>
+            <a:r>
+              <a:t>美国国父华盛顿在连任两届总统后，主动放弃权力，开创了和平交接的先河。他放弃的是权力，得到的是永恒的尊敬。</a:t>
+            </a:r>
+          </a:p>
+        </p:txBody>
+      </p:sp>
+      <p:sp>
+        <p:nvSpPr>
+          <p:cNvPr id="7" name="TextBox 6"/>
           <p:cNvSpPr txBox="1"/>
           <p:nvPr/>
         </p:nvSpPr>
         <p:spPr>
           <a:xfrm>
-            <a:off x="457200" y="347472"/>
-            <a:ext cx="8229600" cy="685800"/>
+            <a:off x="8229600" y="6400800"/>
+            <a:ext cx="731520" cy="274320"/>
           </a:xfrm>
           <a:prstGeom prst="rect">
             <a:avLst/>
@@ -5151,394 +4902,15 @@
           </a:bodyPr>
           <a:lstStyle/>
           <a:p>
-            <a:pPr>
-              <a:defRPr sz="2600" b="1">
-                <a:solidFill>
-                  <a:srgbClr val="FFFFFF"/>
-                </a:solidFill>
-              </a:defRPr>
-            </a:pPr>
-            <a:r>
-              <a:t>第7章 · 典故与案例</a:t>
-            </a:r>
-          </a:p>
-        </p:txBody>
-      </p:sp>
-      <p:sp>
-        <p:nvSpPr>
-          <p:cNvPr id="5" name="TextBox 4"/>
-          <p:cNvSpPr txBox="1"/>
-          <p:nvPr/>
-        </p:nvSpPr>
-        <p:spPr>
-          <a:xfrm>
-            <a:off x="0" y="6400800"/>
-            <a:ext cx="9144000" cy="365760"/>
-          </a:xfrm>
-          <a:prstGeom prst="rect">
-            <a:avLst/>
-          </a:prstGeom>
-          <a:noFill/>
-        </p:spPr>
-        <p:txBody>
-          <a:bodyPr wrap="none">
-            <a:spAutoFit/>
-          </a:bodyPr>
-          <a:lstStyle/>
-          <a:p>
-            <a:pPr algn="ctr">
+            <a:pPr algn="r">
               <a:defRPr sz="1000">
                 <a:solidFill>
-                  <a:srgbClr val="B45A28"/>
-                </a:solidFill>
-              </a:defRPr>
-            </a:pPr>
-            <a:r>
-              <a:t>《道德经》打卡学习 · 小燕子 🐦</a:t>
-            </a:r>
-          </a:p>
-        </p:txBody>
-      </p:sp>
-      <p:sp>
-        <p:nvSpPr>
-          <p:cNvPr id="6" name="TextBox 5"/>
-          <p:cNvSpPr txBox="1"/>
-          <p:nvPr/>
-        </p:nvSpPr>
-        <p:spPr>
-          <a:xfrm>
-            <a:off x="365760" y="1"/>
-            <a:ext cx="4114800" cy="731520"/>
-          </a:xfrm>
-          <a:prstGeom prst="rect">
-            <a:avLst/>
-          </a:prstGeom>
-          <a:noFill/>
-        </p:spPr>
-        <p:txBody>
-          <a:bodyPr wrap="square">
-            <a:spAutoFit/>
-          </a:bodyPr>
-          <a:lstStyle/>
-          <a:p>
-            <a:pPr>
-              <a:defRPr sz="1250">
-                <a:solidFill>
-                  <a:srgbClr val="321E0F"/>
-                </a:solidFill>
-              </a:defRPr>
-            </a:pPr>
-            <a:r>
-              <a:t>🏛️ 【中国典故】范蠡三散财</a:t>
-            </a:r>
-          </a:p>
-        </p:txBody>
-      </p:sp>
-      <p:sp>
-        <p:nvSpPr>
-          <p:cNvPr id="7" name="TextBox 6"/>
-          <p:cNvSpPr txBox="1"/>
-          <p:nvPr/>
-        </p:nvSpPr>
-        <p:spPr>
-          <a:xfrm>
-            <a:off x="365760" y="2"/>
-            <a:ext cx="4114800" cy="731520"/>
-          </a:xfrm>
-          <a:prstGeom prst="rect">
-            <a:avLst/>
-          </a:prstGeom>
-          <a:noFill/>
-        </p:spPr>
-        <p:txBody>
-          <a:bodyPr wrap="square">
-            <a:spAutoFit/>
-          </a:bodyPr>
-          <a:lstStyle/>
-          <a:p>
-            <a:pPr>
-              <a:defRPr sz="1250">
-                <a:solidFill>
-                  <a:srgbClr val="321E0F"/>
-                </a:solidFill>
-              </a:defRPr>
-            </a:pPr>
-            <a:r>
-              <a:t>春秋范蠡辅佐越王勾践灭吴后，主动隐退，散尽家财，泛舟五湖。后又白手起家成为巨富，三散三聚，被后人尊为'商圣'。正因不争功名，反而名垂千古。</a:t>
-            </a:r>
-          </a:p>
-        </p:txBody>
-      </p:sp>
-      <p:sp>
-        <p:nvSpPr>
-          <p:cNvPr id="8" name="TextBox 7"/>
-          <p:cNvSpPr txBox="1"/>
-          <p:nvPr/>
-        </p:nvSpPr>
-        <p:spPr>
-          <a:xfrm>
-            <a:off x="365760" y="3"/>
-            <a:ext cx="4114800" cy="731520"/>
-          </a:xfrm>
-          <a:prstGeom prst="rect">
-            <a:avLst/>
-          </a:prstGeom>
-          <a:noFill/>
-        </p:spPr>
-        <p:txBody>
-          <a:bodyPr wrap="square">
-            <a:spAutoFit/>
-          </a:bodyPr>
-          <a:lstStyle/>
-          <a:p>
-            <a:pPr>
-              <a:defRPr sz="1250">
-                <a:solidFill>
-                  <a:srgbClr val="321E0F"/>
-                </a:solidFill>
-              </a:defRPr>
-            </a:pPr>
-          </a:p>
-        </p:txBody>
-      </p:sp>
-      <p:sp>
-        <p:nvSpPr>
-          <p:cNvPr id="9" name="TextBox 8"/>
-          <p:cNvSpPr txBox="1"/>
-          <p:nvPr/>
-        </p:nvSpPr>
-        <p:spPr>
-          <a:xfrm>
-            <a:off x="365760" y="3"/>
-            <a:ext cx="4114800" cy="731520"/>
-          </a:xfrm>
-          <a:prstGeom prst="rect">
-            <a:avLst/>
-          </a:prstGeom>
-          <a:noFill/>
-        </p:spPr>
-        <p:txBody>
-          <a:bodyPr wrap="square">
-            <a:spAutoFit/>
-          </a:bodyPr>
-          <a:lstStyle/>
-          <a:p>
-            <a:pPr>
-              <a:defRPr sz="1250">
-                <a:solidFill>
-                  <a:srgbClr val="321E0F"/>
-                </a:solidFill>
-              </a:defRPr>
-            </a:pPr>
-            <a:r>
-              <a:t>🏛️ 【历史镜鉴】张良的智慧</a:t>
-            </a:r>
-          </a:p>
-        </p:txBody>
-      </p:sp>
-      <p:sp>
-        <p:nvSpPr>
-          <p:cNvPr id="10" name="TextBox 9"/>
-          <p:cNvSpPr txBox="1"/>
-          <p:nvPr/>
-        </p:nvSpPr>
-        <p:spPr>
-          <a:xfrm>
-            <a:off x="365760" y="4"/>
-            <a:ext cx="4114800" cy="731520"/>
-          </a:xfrm>
-          <a:prstGeom prst="rect">
-            <a:avLst/>
-          </a:prstGeom>
-          <a:noFill/>
-        </p:spPr>
-        <p:txBody>
-          <a:bodyPr wrap="square">
-            <a:spAutoFit/>
-          </a:bodyPr>
-          <a:lstStyle/>
-          <a:p>
-            <a:pPr>
-              <a:defRPr sz="1250">
-                <a:solidFill>
-                  <a:srgbClr val="321E0F"/>
-                </a:solidFill>
-              </a:defRPr>
-            </a:pPr>
-            <a:r>
-              <a:t>张良运筹帷幄，助刘邦定天下功成名就后，选择辟谷修道，不恋权位。功成身退，保全自身与家族安稳。</a:t>
-            </a:r>
-          </a:p>
-        </p:txBody>
-      </p:sp>
-      <p:sp>
-        <p:nvSpPr>
-          <p:cNvPr id="11" name="TextBox 10"/>
-          <p:cNvSpPr txBox="1"/>
-          <p:nvPr/>
-        </p:nvSpPr>
-        <p:spPr>
-          <a:xfrm>
-            <a:off x="4663440" y="1"/>
-            <a:ext cx="4114800" cy="731520"/>
-          </a:xfrm>
-          <a:prstGeom prst="rect">
-            <a:avLst/>
-          </a:prstGeom>
-          <a:noFill/>
-        </p:spPr>
-        <p:txBody>
-          <a:bodyPr wrap="square">
-            <a:spAutoFit/>
-          </a:bodyPr>
-          <a:lstStyle/>
-          <a:p>
-            <a:pPr>
-              <a:defRPr sz="1250">
-                <a:solidFill>
-                  <a:srgbClr val="321E0F"/>
-                </a:solidFill>
-              </a:defRPr>
-            </a:pPr>
-            <a:r>
-              <a:t>🌍 【国外案例】华盛顿急流勇退</a:t>
-            </a:r>
-          </a:p>
-        </p:txBody>
-      </p:sp>
-      <p:sp>
-        <p:nvSpPr>
-          <p:cNvPr id="12" name="TextBox 11"/>
-          <p:cNvSpPr txBox="1"/>
-          <p:nvPr/>
-        </p:nvSpPr>
-        <p:spPr>
-          <a:xfrm>
-            <a:off x="4663440" y="2"/>
-            <a:ext cx="4114800" cy="731520"/>
-          </a:xfrm>
-          <a:prstGeom prst="rect">
-            <a:avLst/>
-          </a:prstGeom>
-          <a:noFill/>
-        </p:spPr>
-        <p:txBody>
-          <a:bodyPr wrap="square">
-            <a:spAutoFit/>
-          </a:bodyPr>
-          <a:lstStyle/>
-          <a:p>
-            <a:pPr>
-              <a:defRPr sz="1250">
-                <a:solidFill>
-                  <a:srgbClr val="321E0F"/>
-                </a:solidFill>
-              </a:defRPr>
-            </a:pPr>
-            <a:r>
-              <a:t>美国国父华盛顿在连任两届总统后，主动放弃权力，开创了和平交接的先河。他放弃的是权力，得到的是永恒的尊敬。</a:t>
-            </a:r>
-          </a:p>
-        </p:txBody>
-      </p:sp>
-      <p:sp>
-        <p:nvSpPr>
-          <p:cNvPr id="13" name="TextBox 12"/>
-          <p:cNvSpPr txBox="1"/>
-          <p:nvPr/>
-        </p:nvSpPr>
-        <p:spPr>
-          <a:xfrm>
-            <a:off x="4663440" y="3"/>
-            <a:ext cx="4114800" cy="731520"/>
-          </a:xfrm>
-          <a:prstGeom prst="rect">
-            <a:avLst/>
-          </a:prstGeom>
-          <a:noFill/>
-        </p:spPr>
-        <p:txBody>
-          <a:bodyPr wrap="square">
-            <a:spAutoFit/>
-          </a:bodyPr>
-          <a:lstStyle/>
-          <a:p>
-            <a:pPr>
-              <a:defRPr sz="1250">
-                <a:solidFill>
-                  <a:srgbClr val="321E0F"/>
-                </a:solidFill>
-              </a:defRPr>
-            </a:pPr>
-          </a:p>
-        </p:txBody>
-      </p:sp>
-      <p:sp>
-        <p:nvSpPr>
-          <p:cNvPr id="14" name="TextBox 13"/>
-          <p:cNvSpPr txBox="1"/>
-          <p:nvPr/>
-        </p:nvSpPr>
-        <p:spPr>
-          <a:xfrm>
-            <a:off x="4663440" y="3"/>
-            <a:ext cx="4114800" cy="731520"/>
-          </a:xfrm>
-          <a:prstGeom prst="rect">
-            <a:avLst/>
-          </a:prstGeom>
-          <a:noFill/>
-        </p:spPr>
-        <p:txBody>
-          <a:bodyPr wrap="square">
-            <a:spAutoFit/>
-          </a:bodyPr>
-          <a:lstStyle/>
-          <a:p>
-            <a:pPr>
-              <a:defRPr sz="1250">
-                <a:solidFill>
-                  <a:srgbClr val="321E0F"/>
-                </a:solidFill>
-              </a:defRPr>
-            </a:pPr>
-            <a:r>
-              <a:t>💡 【管理启示】</a:t>
-            </a:r>
-          </a:p>
-        </p:txBody>
-      </p:sp>
-      <p:sp>
-        <p:nvSpPr>
-          <p:cNvPr id="15" name="TextBox 14"/>
-          <p:cNvSpPr txBox="1"/>
-          <p:nvPr/>
-        </p:nvSpPr>
-        <p:spPr>
-          <a:xfrm>
-            <a:off x="4663440" y="4"/>
-            <a:ext cx="4114800" cy="731520"/>
-          </a:xfrm>
-          <a:prstGeom prst="rect">
-            <a:avLst/>
-          </a:prstGeom>
-          <a:noFill/>
-        </p:spPr>
-        <p:txBody>
-          <a:bodyPr wrap="square">
-            <a:spAutoFit/>
-          </a:bodyPr>
-          <a:lstStyle/>
-          <a:p>
-            <a:pPr>
-              <a:defRPr sz="1250">
-                <a:solidFill>
-                  <a:srgbClr val="321E0F"/>
-                </a:solidFill>
-              </a:defRPr>
-            </a:pPr>
-            <a:r>
-              <a:t>真正卓越的领导者懂得'后其身而身先'——不争功、不揽权，反而赢得团队的追随与信任。</a:t>
+                  <a:srgbClr val="969696"/>
+                </a:solidFill>
+              </a:defRPr>
+            </a:pPr>
+            <a:r>
+              <a:t>3/12</a:t>
             </a:r>
           </a:p>
         </p:txBody>
@@ -5554,14 +4926,6 @@
 <file path=ppt/slides/slide4.xml><?xml version="1.0" encoding="utf-8"?>
 <p:sld xmlns:a="http://schemas.openxmlformats.org/drawingml/2006/main" xmlns:p="http://schemas.openxmlformats.org/presentationml/2006/main" xmlns:r="http://schemas.openxmlformats.org/officeDocument/2006/relationships">
   <p:cSld>
-    <p:bg>
-      <p:bgPr>
-        <a:solidFill>
-          <a:srgbClr val="FCF8EE"/>
-        </a:solidFill>
-        <a:effectLst/>
-      </p:bgPr>
-    </p:bg>
     <p:spTree>
       <p:nvGrpSpPr>
         <p:cNvPr id="1" name=""/>
@@ -5578,13 +4942,13 @@
         <p:spPr>
           <a:xfrm>
             <a:off x="0" y="0"/>
-            <a:ext cx="9144000" cy="1188720"/>
+            <a:ext cx="9144000" cy="1097280"/>
           </a:xfrm>
           <a:prstGeom prst="rect">
             <a:avLst/>
           </a:prstGeom>
           <a:solidFill>
-            <a:srgbClr val="502814"/>
+            <a:srgbClr val="1E3C72"/>
           </a:solidFill>
           <a:ln>
             <a:noFill/>
@@ -5620,8 +4984,8 @@
         </p:nvSpPr>
         <p:spPr>
           <a:xfrm>
-            <a:off x="457200" y="73152"/>
-            <a:ext cx="8229600" cy="411480"/>
+            <a:off x="457200" y="228600"/>
+            <a:ext cx="8229600" cy="731520"/>
           </a:xfrm>
           <a:prstGeom prst="rect">
             <a:avLst/>
@@ -5635,248 +4999,35 @@
           <a:lstStyle/>
           <a:p>
             <a:pPr>
-              <a:defRPr sz="1300">
-                <a:solidFill>
-                  <a:srgbClr val="C8A03C"/>
-                </a:solidFill>
-              </a:defRPr>
-            </a:pPr>
-            <a:r>
-              <a:t>Chapter 7 · Insights</a:t>
-            </a:r>
-          </a:p>
-        </p:txBody>
-      </p:sp>
-      <p:sp>
-        <p:nvSpPr>
-          <p:cNvPr id="4" name="TextBox 3"/>
-          <p:cNvSpPr txBox="1"/>
-          <p:nvPr/>
-        </p:nvSpPr>
-        <p:spPr>
-          <a:xfrm>
-            <a:off x="457200" y="347472"/>
-            <a:ext cx="8229600" cy="685800"/>
-          </a:xfrm>
-          <a:prstGeom prst="rect">
-            <a:avLst/>
-          </a:prstGeom>
-          <a:noFill/>
-        </p:spPr>
-        <p:txBody>
-          <a:bodyPr wrap="none">
-            <a:spAutoFit/>
-          </a:bodyPr>
-          <a:lstStyle/>
-          <a:p>
-            <a:pPr>
-              <a:defRPr sz="2600" b="1">
+              <a:defRPr sz="3200" b="1">
                 <a:solidFill>
                   <a:srgbClr val="FFFFFF"/>
                 </a:solidFill>
               </a:defRPr>
             </a:pPr>
             <a:r>
-              <a:t>第7章 · 精华提炼</a:t>
-            </a:r>
-          </a:p>
-        </p:txBody>
-      </p:sp>
-      <p:sp>
-        <p:nvSpPr>
-          <p:cNvPr id="5" name="TextBox 4"/>
-          <p:cNvSpPr txBox="1"/>
-          <p:nvPr/>
-        </p:nvSpPr>
-        <p:spPr>
-          <a:xfrm>
-            <a:off x="0" y="6400800"/>
-            <a:ext cx="9144000" cy="365760"/>
-          </a:xfrm>
-          <a:prstGeom prst="rect">
-            <a:avLst/>
-          </a:prstGeom>
-          <a:noFill/>
-        </p:spPr>
-        <p:txBody>
-          <a:bodyPr wrap="none">
-            <a:spAutoFit/>
-          </a:bodyPr>
-          <a:lstStyle/>
-          <a:p>
-            <a:pPr algn="ctr">
-              <a:defRPr sz="1000">
-                <a:solidFill>
-                  <a:srgbClr val="B45A28"/>
-                </a:solidFill>
-              </a:defRPr>
-            </a:pPr>
-            <a:r>
-              <a:t>《道德经》打卡学习 · 小燕子 🐦</a:t>
-            </a:r>
-          </a:p>
-        </p:txBody>
-      </p:sp>
-      <p:sp>
-        <p:nvSpPr>
-          <p:cNvPr id="6" name="TextBox 5"/>
-          <p:cNvSpPr txBox="1"/>
-          <p:nvPr/>
-        </p:nvSpPr>
-        <p:spPr>
-          <a:xfrm>
-            <a:off x="731520" y="1"/>
-            <a:ext cx="7680960" cy="731520"/>
-          </a:xfrm>
-          <a:prstGeom prst="rect">
-            <a:avLst/>
-          </a:prstGeom>
-          <a:noFill/>
-        </p:spPr>
-        <p:txBody>
-          <a:bodyPr wrap="square">
-            <a:spAutoFit/>
-          </a:bodyPr>
-          <a:lstStyle/>
-          <a:p>
-            <a:pPr>
-              <a:defRPr sz="1600">
-                <a:solidFill>
-                  <a:srgbClr val="321E0F"/>
-                </a:solidFill>
-              </a:defRPr>
-            </a:pPr>
-            <a:r>
-              <a:t>✅ 核心要义：天地不为自己，故能长生；圣人不私，故能成其私。</a:t>
-            </a:r>
-          </a:p>
-        </p:txBody>
-      </p:sp>
-      <p:sp>
-        <p:nvSpPr>
-          <p:cNvPr id="7" name="TextBox 6"/>
-          <p:cNvSpPr txBox="1"/>
-          <p:nvPr/>
-        </p:nvSpPr>
-        <p:spPr>
-          <a:xfrm>
-            <a:off x="731520" y="2"/>
-            <a:ext cx="7680960" cy="731520"/>
-          </a:xfrm>
-          <a:prstGeom prst="rect">
-            <a:avLst/>
-          </a:prstGeom>
-          <a:noFill/>
-        </p:spPr>
-        <p:txBody>
-          <a:bodyPr wrap="square">
-            <a:spAutoFit/>
-          </a:bodyPr>
-          <a:lstStyle/>
-          <a:p>
-            <a:pPr>
-              <a:defRPr sz="1600">
-                <a:solidFill>
-                  <a:srgbClr val="321E0F"/>
-                </a:solidFill>
-              </a:defRPr>
-            </a:pPr>
-            <a:r>
-              <a:t>✅ 关键词：无私、后其身、外其身、功成身退。</a:t>
-            </a:r>
-          </a:p>
-        </p:txBody>
-      </p:sp>
-      <p:sp>
-        <p:nvSpPr>
-          <p:cNvPr id="8" name="TextBox 7"/>
-          <p:cNvSpPr txBox="1"/>
-          <p:nvPr/>
-        </p:nvSpPr>
-        <p:spPr>
-          <a:xfrm>
-            <a:off x="731520" y="3"/>
-            <a:ext cx="7680960" cy="731520"/>
-          </a:xfrm>
-          <a:prstGeom prst="rect">
-            <a:avLst/>
-          </a:prstGeom>
-          <a:noFill/>
-        </p:spPr>
-        <p:txBody>
-          <a:bodyPr wrap="square">
-            <a:spAutoFit/>
-          </a:bodyPr>
-          <a:lstStyle/>
-          <a:p>
-            <a:pPr>
-              <a:defRPr sz="1600">
-                <a:solidFill>
-                  <a:srgbClr val="321E0F"/>
-                </a:solidFill>
-              </a:defRPr>
-            </a:pPr>
-            <a:r>
-              <a:t>✅ 生活践行：竞争中不争一时之名，得理时让人三分。</a:t>
-            </a:r>
-          </a:p>
-        </p:txBody>
-      </p:sp>
-      <p:sp>
-        <p:nvSpPr>
-          <p:cNvPr id="9" name="TextBox 8"/>
-          <p:cNvSpPr txBox="1"/>
-          <p:nvPr/>
-        </p:nvSpPr>
-        <p:spPr>
-          <a:xfrm>
-            <a:off x="731520" y="4"/>
-            <a:ext cx="7680960" cy="731520"/>
-          </a:xfrm>
-          <a:prstGeom prst="rect">
-            <a:avLst/>
-          </a:prstGeom>
-          <a:noFill/>
-        </p:spPr>
-        <p:txBody>
-          <a:bodyPr wrap="square">
-            <a:spAutoFit/>
-          </a:bodyPr>
-          <a:lstStyle/>
-          <a:p>
-            <a:pPr>
-              <a:defRPr sz="1600">
-                <a:solidFill>
-                  <a:srgbClr val="321E0F"/>
-                </a:solidFill>
-              </a:defRPr>
-            </a:pPr>
-            <a:r>
-              <a:t>✅ 管理启示：成事之后不居功，主动分享荣誉给团队。</a:t>
-            </a:r>
-          </a:p>
-        </p:txBody>
-      </p:sp>
-      <p:sp>
-        <p:nvSpPr>
-          <p:cNvPr id="10" name="Rounded Rectangle 9"/>
+              <a:t>第七章 · 精华提炼</a:t>
+            </a:r>
+          </a:p>
+        </p:txBody>
+      </p:sp>
+      <p:sp>
+        <p:nvSpPr>
+          <p:cNvPr id="4" name="Rounded Rectangle 3"/>
           <p:cNvSpPr/>
           <p:nvPr/>
         </p:nvSpPr>
         <p:spPr>
           <a:xfrm>
-            <a:off x="731520" y="4846320"/>
-            <a:ext cx="7680960" cy="1188720"/>
+            <a:off x="457200" y="1280160"/>
+            <a:ext cx="8229600" cy="914400"/>
           </a:xfrm>
           <a:prstGeom prst="roundRect">
             <a:avLst/>
           </a:prstGeom>
           <a:solidFill>
-            <a:srgbClr val="B45A28"/>
+            <a:srgbClr val="F5F5F0"/>
           </a:solidFill>
-          <a:ln>
-            <a:noFill/>
-          </a:ln>
         </p:spPr>
         <p:style>
           <a:lnRef idx="1">
@@ -5893,23 +5044,228 @@
           </a:fontRef>
         </p:style>
         <p:txBody>
-          <a:bodyPr rtlCol="0" anchor="ctr"/>
-          <a:lstStyle/>
-          <a:p>
-            <a:pPr algn="ctr"/>
-          </a:p>
-        </p:txBody>
-      </p:sp>
-      <p:sp>
-        <p:nvSpPr>
-          <p:cNvPr id="11" name="TextBox 10"/>
+          <a:bodyPr rtlCol="0" anchor="ctr" wrap="square"/>
+          <a:lstStyle/>
+          <a:p>
+            <a:pPr algn="ctr">
+              <a:defRPr sz="1600">
+                <a:solidFill>
+                  <a:srgbClr val="333333"/>
+                </a:solidFill>
+              </a:defRPr>
+            </a:pPr>
+            <a:r>
+              <a:t>• 核心要义：天地不为自己，故能长生；圣人不私，故能成其私。</a:t>
+            </a:r>
+          </a:p>
+        </p:txBody>
+      </p:sp>
+      <p:sp>
+        <p:nvSpPr>
+          <p:cNvPr id="5" name="Rounded Rectangle 4"/>
+          <p:cNvSpPr/>
+          <p:nvPr/>
+        </p:nvSpPr>
+        <p:spPr>
+          <a:xfrm>
+            <a:off x="457200" y="2286000"/>
+            <a:ext cx="8229600" cy="914400"/>
+          </a:xfrm>
+          <a:prstGeom prst="roundRect">
+            <a:avLst/>
+          </a:prstGeom>
+          <a:solidFill>
+            <a:srgbClr val="F5F5F0"/>
+          </a:solidFill>
+        </p:spPr>
+        <p:style>
+          <a:lnRef idx="1">
+            <a:schemeClr val="accent1"/>
+          </a:lnRef>
+          <a:fillRef idx="3">
+            <a:schemeClr val="accent1"/>
+          </a:fillRef>
+          <a:effectRef idx="2">
+            <a:schemeClr val="accent1"/>
+          </a:effectRef>
+          <a:fontRef idx="minor">
+            <a:schemeClr val="lt1"/>
+          </a:fontRef>
+        </p:style>
+        <p:txBody>
+          <a:bodyPr rtlCol="0" anchor="ctr" wrap="square"/>
+          <a:lstStyle/>
+          <a:p>
+            <a:pPr algn="ctr">
+              <a:defRPr sz="1600">
+                <a:solidFill>
+                  <a:srgbClr val="333333"/>
+                </a:solidFill>
+              </a:defRPr>
+            </a:pPr>
+            <a:r>
+              <a:t>• 关键词：无私、后其身、外其身、功成身退。</a:t>
+            </a:r>
+          </a:p>
+        </p:txBody>
+      </p:sp>
+      <p:sp>
+        <p:nvSpPr>
+          <p:cNvPr id="6" name="Rounded Rectangle 5"/>
+          <p:cNvSpPr/>
+          <p:nvPr/>
+        </p:nvSpPr>
+        <p:spPr>
+          <a:xfrm>
+            <a:off x="457200" y="3291840"/>
+            <a:ext cx="8229600" cy="914400"/>
+          </a:xfrm>
+          <a:prstGeom prst="roundRect">
+            <a:avLst/>
+          </a:prstGeom>
+          <a:solidFill>
+            <a:srgbClr val="F5F5F0"/>
+          </a:solidFill>
+        </p:spPr>
+        <p:style>
+          <a:lnRef idx="1">
+            <a:schemeClr val="accent1"/>
+          </a:lnRef>
+          <a:fillRef idx="3">
+            <a:schemeClr val="accent1"/>
+          </a:fillRef>
+          <a:effectRef idx="2">
+            <a:schemeClr val="accent1"/>
+          </a:effectRef>
+          <a:fontRef idx="minor">
+            <a:schemeClr val="lt1"/>
+          </a:fontRef>
+        </p:style>
+        <p:txBody>
+          <a:bodyPr rtlCol="0" anchor="ctr" wrap="square"/>
+          <a:lstStyle/>
+          <a:p>
+            <a:pPr algn="ctr">
+              <a:defRPr sz="1600">
+                <a:solidFill>
+                  <a:srgbClr val="333333"/>
+                </a:solidFill>
+              </a:defRPr>
+            </a:pPr>
+            <a:r>
+              <a:t>• 生活践行：竞争中不争一时之名，得理时让人三分。</a:t>
+            </a:r>
+          </a:p>
+        </p:txBody>
+      </p:sp>
+      <p:sp>
+        <p:nvSpPr>
+          <p:cNvPr id="7" name="Rounded Rectangle 6"/>
+          <p:cNvSpPr/>
+          <p:nvPr/>
+        </p:nvSpPr>
+        <p:spPr>
+          <a:xfrm>
+            <a:off x="457200" y="4297680"/>
+            <a:ext cx="8229600" cy="914400"/>
+          </a:xfrm>
+          <a:prstGeom prst="roundRect">
+            <a:avLst/>
+          </a:prstGeom>
+          <a:solidFill>
+            <a:srgbClr val="F5F5F0"/>
+          </a:solidFill>
+        </p:spPr>
+        <p:style>
+          <a:lnRef idx="1">
+            <a:schemeClr val="accent1"/>
+          </a:lnRef>
+          <a:fillRef idx="3">
+            <a:schemeClr val="accent1"/>
+          </a:fillRef>
+          <a:effectRef idx="2">
+            <a:schemeClr val="accent1"/>
+          </a:effectRef>
+          <a:fontRef idx="minor">
+            <a:schemeClr val="lt1"/>
+          </a:fontRef>
+        </p:style>
+        <p:txBody>
+          <a:bodyPr rtlCol="0" anchor="ctr" wrap="square"/>
+          <a:lstStyle/>
+          <a:p>
+            <a:pPr algn="ctr">
+              <a:defRPr sz="1600">
+                <a:solidFill>
+                  <a:srgbClr val="333333"/>
+                </a:solidFill>
+              </a:defRPr>
+            </a:pPr>
+            <a:r>
+              <a:t>• 管理启示：成事之后不居功，主动分享荣誉给团队。</a:t>
+            </a:r>
+          </a:p>
+        </p:txBody>
+      </p:sp>
+      <p:sp>
+        <p:nvSpPr>
+          <p:cNvPr id="8" name="Rounded Rectangle 7"/>
+          <p:cNvSpPr/>
+          <p:nvPr/>
+        </p:nvSpPr>
+        <p:spPr>
+          <a:xfrm>
+            <a:off x="457200" y="5303520"/>
+            <a:ext cx="8229600" cy="914400"/>
+          </a:xfrm>
+          <a:prstGeom prst="roundRect">
+            <a:avLst/>
+          </a:prstGeom>
+          <a:solidFill>
+            <a:srgbClr val="4682B4"/>
+          </a:solidFill>
+        </p:spPr>
+        <p:style>
+          <a:lnRef idx="1">
+            <a:schemeClr val="accent1"/>
+          </a:lnRef>
+          <a:fillRef idx="3">
+            <a:schemeClr val="accent1"/>
+          </a:fillRef>
+          <a:effectRef idx="2">
+            <a:schemeClr val="accent1"/>
+          </a:effectRef>
+          <a:fontRef idx="minor">
+            <a:schemeClr val="lt1"/>
+          </a:fontRef>
+        </p:style>
+        <p:txBody>
+          <a:bodyPr rtlCol="0" anchor="ctr" wrap="square"/>
+          <a:lstStyle/>
+          <a:p>
+            <a:pPr algn="ctr">
+              <a:defRPr sz="1600">
+                <a:solidFill>
+                  <a:srgbClr val="FFFFFF"/>
+                </a:solidFill>
+              </a:defRPr>
+            </a:pPr>
+            <a:r>
+              <a:t>一句话总结：不为自己，反而能成就自己；懂得退让，才是真正的领先。</a:t>
+            </a:r>
+          </a:p>
+        </p:txBody>
+      </p:sp>
+      <p:sp>
+        <p:nvSpPr>
+          <p:cNvPr id="9" name="TextBox 8"/>
           <p:cNvSpPr txBox="1"/>
           <p:nvPr/>
         </p:nvSpPr>
         <p:spPr>
           <a:xfrm>
-            <a:off x="914400" y="5029200"/>
-            <a:ext cx="7315200" cy="914400"/>
+            <a:off x="8229600" y="6400800"/>
+            <a:ext cx="731520" cy="274320"/>
           </a:xfrm>
           <a:prstGeom prst="rect">
             <a:avLst/>
@@ -5917,20 +5273,20 @@
           <a:noFill/>
         </p:spPr>
         <p:txBody>
-          <a:bodyPr wrap="square">
+          <a:bodyPr wrap="none">
             <a:spAutoFit/>
           </a:bodyPr>
           <a:lstStyle/>
           <a:p>
-            <a:pPr algn="ctr">
-              <a:defRPr sz="1600">
-                <a:solidFill>
-                  <a:srgbClr val="FFFFFF"/>
-                </a:solidFill>
-              </a:defRPr>
-            </a:pPr>
-            <a:r>
-              <a:t>💡 一句话总结：不为自己，反而能成就自己；懂得退让，才是真正的领先。</a:t>
+            <a:pPr algn="r">
+              <a:defRPr sz="1000">
+                <a:solidFill>
+                  <a:srgbClr val="969696"/>
+                </a:solidFill>
+              </a:defRPr>
+            </a:pPr>
+            <a:r>
+              <a:t>4/12</a:t>
             </a:r>
           </a:p>
         </p:txBody>
@@ -5946,14 +5302,6 @@
 <file path=ppt/slides/slide5.xml><?xml version="1.0" encoding="utf-8"?>
 <p:sld xmlns:a="http://schemas.openxmlformats.org/drawingml/2006/main" xmlns:p="http://schemas.openxmlformats.org/presentationml/2006/main" xmlns:r="http://schemas.openxmlformats.org/officeDocument/2006/relationships">
   <p:cSld>
-    <p:bg>
-      <p:bgPr>
-        <a:solidFill>
-          <a:srgbClr val="FCF8EE"/>
-        </a:solidFill>
-        <a:effectLst/>
-      </p:bgPr>
-    </p:bg>
     <p:spTree>
       <p:nvGrpSpPr>
         <p:cNvPr id="1" name=""/>
@@ -5970,13 +5318,13 @@
         <p:spPr>
           <a:xfrm>
             <a:off x="0" y="0"/>
-            <a:ext cx="9144000" cy="1188720"/>
+            <a:ext cx="9144000" cy="1097280"/>
           </a:xfrm>
           <a:prstGeom prst="rect">
             <a:avLst/>
           </a:prstGeom>
           <a:solidFill>
-            <a:srgbClr val="502814"/>
+            <a:srgbClr val="1E3C72"/>
           </a:solidFill>
           <a:ln>
             <a:noFill/>
@@ -6012,8 +5360,8 @@
         </p:nvSpPr>
         <p:spPr>
           <a:xfrm>
-            <a:off x="457200" y="73152"/>
-            <a:ext cx="8229600" cy="411480"/>
+            <a:off x="457200" y="228600"/>
+            <a:ext cx="8229600" cy="731520"/>
           </a:xfrm>
           <a:prstGeom prst="rect">
             <a:avLst/>
@@ -6027,110 +5375,35 @@
           <a:lstStyle/>
           <a:p>
             <a:pPr>
-              <a:defRPr sz="1300">
-                <a:solidFill>
-                  <a:srgbClr val="C8A03C"/>
-                </a:solidFill>
-              </a:defRPr>
-            </a:pPr>
-            <a:r>
-              <a:t>Chapter 8</a:t>
-            </a:r>
-          </a:p>
-        </p:txBody>
-      </p:sp>
-      <p:sp>
-        <p:nvSpPr>
-          <p:cNvPr id="4" name="TextBox 3"/>
-          <p:cNvSpPr txBox="1"/>
-          <p:nvPr/>
-        </p:nvSpPr>
-        <p:spPr>
-          <a:xfrm>
-            <a:off x="457200" y="347472"/>
-            <a:ext cx="8229600" cy="685800"/>
-          </a:xfrm>
-          <a:prstGeom prst="rect">
-            <a:avLst/>
-          </a:prstGeom>
-          <a:noFill/>
-        </p:spPr>
-        <p:txBody>
-          <a:bodyPr wrap="none">
-            <a:spAutoFit/>
-          </a:bodyPr>
-          <a:lstStyle/>
-          <a:p>
-            <a:pPr>
-              <a:defRPr sz="2600" b="1">
+              <a:defRPr sz="3200" b="1">
                 <a:solidFill>
                   <a:srgbClr val="FFFFFF"/>
                 </a:solidFill>
               </a:defRPr>
             </a:pPr>
             <a:r>
-              <a:t>第8章 · 上善若水</a:t>
-            </a:r>
-          </a:p>
-        </p:txBody>
-      </p:sp>
-      <p:sp>
-        <p:nvSpPr>
-          <p:cNvPr id="5" name="TextBox 4"/>
-          <p:cNvSpPr txBox="1"/>
-          <p:nvPr/>
-        </p:nvSpPr>
-        <p:spPr>
-          <a:xfrm>
-            <a:off x="0" y="6400800"/>
-            <a:ext cx="9144000" cy="365760"/>
-          </a:xfrm>
-          <a:prstGeom prst="rect">
-            <a:avLst/>
-          </a:prstGeom>
-          <a:noFill/>
-        </p:spPr>
-        <p:txBody>
-          <a:bodyPr wrap="none">
-            <a:spAutoFit/>
-          </a:bodyPr>
-          <a:lstStyle/>
-          <a:p>
-            <a:pPr algn="ctr">
-              <a:defRPr sz="1000">
-                <a:solidFill>
-                  <a:srgbClr val="B45A28"/>
-                </a:solidFill>
-              </a:defRPr>
-            </a:pPr>
-            <a:r>
-              <a:t>《道德经》打卡学习 · 小燕子 🐦</a:t>
-            </a:r>
-          </a:p>
-        </p:txBody>
-      </p:sp>
-      <p:sp>
-        <p:nvSpPr>
-          <p:cNvPr id="6" name="Rounded Rectangle 5"/>
+              <a:t>第八章 · 上善若水</a:t>
+            </a:r>
+          </a:p>
+        </p:txBody>
+      </p:sp>
+      <p:sp>
+        <p:nvSpPr>
+          <p:cNvPr id="4" name="Rounded Rectangle 3"/>
           <p:cNvSpPr/>
           <p:nvPr/>
         </p:nvSpPr>
         <p:spPr>
           <a:xfrm>
-            <a:off x="457200" y="1371600"/>
-            <a:ext cx="8229600" cy="1645920"/>
+            <a:off x="457200" y="1280160"/>
+            <a:ext cx="8229600" cy="2194560"/>
           </a:xfrm>
           <a:prstGeom prst="roundRect">
             <a:avLst/>
           </a:prstGeom>
           <a:solidFill>
-            <a:srgbClr val="F0E8DA"/>
+            <a:srgbClr val="F5F5F0"/>
           </a:solidFill>
-          <a:ln>
-            <a:solidFill>
-              <a:srgbClr val="C8A03C"/>
-            </a:solidFill>
-          </a:ln>
         </p:spPr>
         <p:style>
           <a:lnRef idx="1">
@@ -6147,23 +5420,77 @@
           </a:fontRef>
         </p:style>
         <p:txBody>
-          <a:bodyPr rtlCol="0" anchor="ctr"/>
-          <a:lstStyle/>
-          <a:p>
-            <a:pPr algn="ctr"/>
-          </a:p>
-        </p:txBody>
-      </p:sp>
-      <p:sp>
-        <p:nvSpPr>
-          <p:cNvPr id="7" name="TextBox 6"/>
+          <a:bodyPr rtlCol="0" anchor="ctr" wrap="square"/>
+          <a:lstStyle/>
+          <a:p>
+            <a:pPr algn="ctr">
+              <a:defRPr sz="1800" b="1">
+                <a:solidFill>
+                  <a:srgbClr val="1E3C72"/>
+                </a:solidFill>
+              </a:defRPr>
+            </a:pPr>
+            <a:r>
+              <a:t>【原文】</a:t>
+            </a:r>
+          </a:p>
+          <a:p>
+            <a:pPr>
+              <a:spcBef>
+                <a:spcPts val="400"/>
+              </a:spcBef>
+              <a:defRPr sz="1700">
+                <a:solidFill>
+                  <a:srgbClr val="333333"/>
+                </a:solidFill>
+              </a:defRPr>
+            </a:pPr>
+            <a:r>
+              <a:t>上善若水。水善利万物而不争，处众人之所恶，故几于道。</a:t>
+            </a:r>
+          </a:p>
+          <a:p>
+            <a:pPr>
+              <a:spcBef>
+                <a:spcPts val="400"/>
+              </a:spcBef>
+              <a:defRPr sz="1700">
+                <a:solidFill>
+                  <a:srgbClr val="333333"/>
+                </a:solidFill>
+              </a:defRPr>
+            </a:pPr>
+            <a:r>
+              <a:t>居善地，心善渊，与善仁，言善信，正善治，事善能，动善时。</a:t>
+            </a:r>
+          </a:p>
+          <a:p>
+            <a:pPr>
+              <a:spcBef>
+                <a:spcPts val="400"/>
+              </a:spcBef>
+              <a:defRPr sz="1700">
+                <a:solidFill>
+                  <a:srgbClr val="333333"/>
+                </a:solidFill>
+              </a:defRPr>
+            </a:pPr>
+            <a:r>
+              <a:t>夫唯不争，故无尤。</a:t>
+            </a:r>
+          </a:p>
+        </p:txBody>
+      </p:sp>
+      <p:sp>
+        <p:nvSpPr>
+          <p:cNvPr id="5" name="TextBox 4"/>
           <p:cNvSpPr txBox="1"/>
           <p:nvPr/>
         </p:nvSpPr>
         <p:spPr>
           <a:xfrm>
-            <a:off x="731520" y="1463040"/>
-            <a:ext cx="7680960" cy="1463040"/>
+            <a:off x="457200" y="3657600"/>
+            <a:ext cx="8229600" cy="3200400"/>
           </a:xfrm>
           <a:prstGeom prst="rect">
             <a:avLst/>
@@ -6177,28 +5504,88 @@
           <a:lstStyle/>
           <a:p>
             <a:pPr>
-              <a:defRPr sz="1500">
-                <a:solidFill>
-                  <a:srgbClr val="502814"/>
-                </a:solidFill>
-              </a:defRPr>
-            </a:pPr>
-            <a:r>
-              <a:t>上善若水。水善利万物而不争，处众人之所恶，故几于道。居善地，心善渊，与善仁，言善信，正善治，事善能，动善时。夫唯不争，故无尤。</a:t>
-            </a:r>
-          </a:p>
-        </p:txBody>
-      </p:sp>
-      <p:sp>
-        <p:nvSpPr>
-          <p:cNvPr id="8" name="TextBox 7"/>
+              <a:defRPr sz="1800" b="1">
+                <a:solidFill>
+                  <a:srgbClr val="1E3C72"/>
+                </a:solidFill>
+              </a:defRPr>
+            </a:pPr>
+            <a:r>
+              <a:t>【白话解读】</a:t>
+            </a:r>
+          </a:p>
+          <a:p>
+            <a:pPr>
+              <a:spcBef>
+                <a:spcPts val="500"/>
+              </a:spcBef>
+              <a:defRPr sz="1300">
+                <a:solidFill>
+                  <a:srgbClr val="333333"/>
+                </a:solidFill>
+              </a:defRPr>
+            </a:pPr>
+            <a:r>
+              <a:t>• 最高善行：最高善行就像水：水善于帮助万物，却不与万物争夺。</a:t>
+            </a:r>
+          </a:p>
+          <a:p>
+            <a:pPr>
+              <a:spcBef>
+                <a:spcPts val="500"/>
+              </a:spcBef>
+              <a:defRPr sz="1300">
+                <a:solidFill>
+                  <a:srgbClr val="333333"/>
+                </a:solidFill>
+              </a:defRPr>
+            </a:pPr>
+            <a:r>
+              <a:t>• 接近于道：水甘居众人厌恶的低洼之地，所以最接近于「道」。</a:t>
+            </a:r>
+          </a:p>
+          <a:p>
+            <a:pPr>
+              <a:spcBef>
+                <a:spcPts val="500"/>
+              </a:spcBef>
+              <a:defRPr sz="1300">
+                <a:solidFill>
+                  <a:srgbClr val="333333"/>
+                </a:solidFill>
+              </a:defRPr>
+            </a:pPr>
+            <a:r>
+              <a:t>• 人生七善：居地、心渊、与仁、言信、政治，事能、动时——水的七大美德。</a:t>
+            </a:r>
+          </a:p>
+          <a:p>
+            <a:pPr>
+              <a:spcBef>
+                <a:spcPts val="500"/>
+              </a:spcBef>
+              <a:defRPr sz="1300">
+                <a:solidFill>
+                  <a:srgbClr val="333333"/>
+                </a:solidFill>
+              </a:defRPr>
+            </a:pPr>
+            <a:r>
+              <a:t>• 不争无尤：正因为不争，所以无过——这便是水智慧的完美诠释。</a:t>
+            </a:r>
+          </a:p>
+        </p:txBody>
+      </p:sp>
+      <p:sp>
+        <p:nvSpPr>
+          <p:cNvPr id="6" name="TextBox 5"/>
           <p:cNvSpPr txBox="1"/>
           <p:nvPr/>
         </p:nvSpPr>
         <p:spPr>
           <a:xfrm>
-            <a:off x="731520" y="3"/>
-            <a:ext cx="7680960" cy="685800"/>
+            <a:off x="8229600" y="6400800"/>
+            <a:ext cx="731520" cy="274320"/>
           </a:xfrm>
           <a:prstGeom prst="rect">
             <a:avLst/>
@@ -6206,125 +5593,20 @@
           <a:noFill/>
         </p:spPr>
         <p:txBody>
-          <a:bodyPr wrap="square">
+          <a:bodyPr wrap="none">
             <a:spAutoFit/>
           </a:bodyPr>
           <a:lstStyle/>
           <a:p>
-            <a:pPr>
-              <a:defRPr sz="1400">
-                <a:solidFill>
-                  <a:srgbClr val="321E0F"/>
-                </a:solidFill>
-              </a:defRPr>
-            </a:pPr>
-            <a:r>
-              <a:t>📜 最高善行就像水：水善于帮助万物，却不与万物争夺。</a:t>
-            </a:r>
-          </a:p>
-        </p:txBody>
-      </p:sp>
-      <p:sp>
-        <p:nvSpPr>
-          <p:cNvPr id="9" name="TextBox 8"/>
-          <p:cNvSpPr txBox="1"/>
-          <p:nvPr/>
-        </p:nvSpPr>
-        <p:spPr>
-          <a:xfrm>
-            <a:off x="731520" y="4"/>
-            <a:ext cx="7680960" cy="685800"/>
-          </a:xfrm>
-          <a:prstGeom prst="rect">
-            <a:avLst/>
-          </a:prstGeom>
-          <a:noFill/>
-        </p:spPr>
-        <p:txBody>
-          <a:bodyPr wrap="square">
-            <a:spAutoFit/>
-          </a:bodyPr>
-          <a:lstStyle/>
-          <a:p>
-            <a:pPr>
-              <a:defRPr sz="1400">
-                <a:solidFill>
-                  <a:srgbClr val="321E0F"/>
-                </a:solidFill>
-              </a:defRPr>
-            </a:pPr>
-            <a:r>
-              <a:t>📜 水甘居众人厌恶的低洼之地，所以最接近于「道」。</a:t>
-            </a:r>
-          </a:p>
-        </p:txBody>
-      </p:sp>
-      <p:sp>
-        <p:nvSpPr>
-          <p:cNvPr id="10" name="TextBox 9"/>
-          <p:cNvSpPr txBox="1"/>
-          <p:nvPr/>
-        </p:nvSpPr>
-        <p:spPr>
-          <a:xfrm>
-            <a:off x="731520" y="5"/>
-            <a:ext cx="7680960" cy="685800"/>
-          </a:xfrm>
-          <a:prstGeom prst="rect">
-            <a:avLst/>
-          </a:prstGeom>
-          <a:noFill/>
-        </p:spPr>
-        <p:txBody>
-          <a:bodyPr wrap="square">
-            <a:spAutoFit/>
-          </a:bodyPr>
-          <a:lstStyle/>
-          <a:p>
-            <a:pPr>
-              <a:defRPr sz="1400">
-                <a:solidFill>
-                  <a:srgbClr val="321E0F"/>
-                </a:solidFill>
-              </a:defRPr>
-            </a:pPr>
-            <a:r>
-              <a:t>📜 人生七善：居地、心渊、与仁、言信、政治、事能、动时。</a:t>
-            </a:r>
-          </a:p>
-        </p:txBody>
-      </p:sp>
-      <p:sp>
-        <p:nvSpPr>
-          <p:cNvPr id="11" name="TextBox 10"/>
-          <p:cNvSpPr txBox="1"/>
-          <p:nvPr/>
-        </p:nvSpPr>
-        <p:spPr>
-          <a:xfrm>
-            <a:off x="731520" y="5"/>
-            <a:ext cx="7680960" cy="685800"/>
-          </a:xfrm>
-          <a:prstGeom prst="rect">
-            <a:avLst/>
-          </a:prstGeom>
-          <a:noFill/>
-        </p:spPr>
-        <p:txBody>
-          <a:bodyPr wrap="square">
-            <a:spAutoFit/>
-          </a:bodyPr>
-          <a:lstStyle/>
-          <a:p>
-            <a:pPr>
-              <a:defRPr sz="1400">
-                <a:solidFill>
-                  <a:srgbClr val="321E0F"/>
-                </a:solidFill>
-              </a:defRPr>
-            </a:pPr>
-            <a:r>
-              <a:t>📜 正因为不争，所以无过——这便是水智慧的完美诠释。</a:t>
+            <a:pPr algn="r">
+              <a:defRPr sz="1000">
+                <a:solidFill>
+                  <a:srgbClr val="969696"/>
+                </a:solidFill>
+              </a:defRPr>
+            </a:pPr>
+            <a:r>
+              <a:t>5/12</a:t>
             </a:r>
           </a:p>
         </p:txBody>
@@ -6340,14 +5622,6 @@
 <file path=ppt/slides/slide6.xml><?xml version="1.0" encoding="utf-8"?>
 <p:sld xmlns:a="http://schemas.openxmlformats.org/drawingml/2006/main" xmlns:p="http://schemas.openxmlformats.org/presentationml/2006/main" xmlns:r="http://schemas.openxmlformats.org/officeDocument/2006/relationships">
   <p:cSld>
-    <p:bg>
-      <p:bgPr>
-        <a:solidFill>
-          <a:srgbClr val="FCF8EE"/>
-        </a:solidFill>
-        <a:effectLst/>
-      </p:bgPr>
-    </p:bg>
     <p:spTree>
       <p:nvGrpSpPr>
         <p:cNvPr id="1" name=""/>
@@ -6364,13 +5638,13 @@
         <p:spPr>
           <a:xfrm>
             <a:off x="0" y="0"/>
-            <a:ext cx="9144000" cy="1188720"/>
+            <a:ext cx="9144000" cy="1097280"/>
           </a:xfrm>
           <a:prstGeom prst="rect">
             <a:avLst/>
           </a:prstGeom>
           <a:solidFill>
-            <a:srgbClr val="502814"/>
+            <a:srgbClr val="1E3C72"/>
           </a:solidFill>
           <a:ln>
             <a:noFill/>
@@ -6406,8 +5680,8 @@
         </p:nvSpPr>
         <p:spPr>
           <a:xfrm>
-            <a:off x="457200" y="73152"/>
-            <a:ext cx="8229600" cy="411480"/>
+            <a:off x="457200" y="228600"/>
+            <a:ext cx="8229600" cy="731520"/>
           </a:xfrm>
           <a:prstGeom prst="rect">
             <a:avLst/>
@@ -6421,28 +5695,211 @@
           <a:lstStyle/>
           <a:p>
             <a:pPr>
+              <a:defRPr sz="3200" b="1">
+                <a:solidFill>
+                  <a:srgbClr val="FFFFFF"/>
+                </a:solidFill>
+              </a:defRPr>
+            </a:pPr>
+            <a:r>
+              <a:t>第八章 · 典故与案例</a:t>
+            </a:r>
+          </a:p>
+        </p:txBody>
+      </p:sp>
+      <p:sp>
+        <p:nvSpPr>
+          <p:cNvPr id="4" name="Rounded Rectangle 3"/>
+          <p:cNvSpPr/>
+          <p:nvPr/>
+        </p:nvSpPr>
+        <p:spPr>
+          <a:xfrm>
+            <a:off x="457200" y="1280160"/>
+            <a:ext cx="8229600" cy="1371600"/>
+          </a:xfrm>
+          <a:prstGeom prst="roundRect">
+            <a:avLst/>
+          </a:prstGeom>
+          <a:solidFill>
+            <a:srgbClr val="F5F5F0"/>
+          </a:solidFill>
+        </p:spPr>
+        <p:style>
+          <a:lnRef idx="1">
+            <a:schemeClr val="accent1"/>
+          </a:lnRef>
+          <a:fillRef idx="3">
+            <a:schemeClr val="accent1"/>
+          </a:fillRef>
+          <a:effectRef idx="2">
+            <a:schemeClr val="accent1"/>
+          </a:effectRef>
+          <a:fontRef idx="minor">
+            <a:schemeClr val="lt1"/>
+          </a:fontRef>
+        </p:style>
+        <p:txBody>
+          <a:bodyPr rtlCol="0" anchor="ctr" wrap="square"/>
+          <a:lstStyle/>
+          <a:p>
+            <a:pPr algn="ctr">
+              <a:defRPr sz="1600" b="1">
+                <a:solidFill>
+                  <a:srgbClr val="1E3C72"/>
+                </a:solidFill>
+              </a:defRPr>
+            </a:pPr>
+            <a:r>
+              <a:t>【中国典故】大禹治水</a:t>
+            </a:r>
+          </a:p>
+          <a:p>
+            <a:pPr>
               <a:defRPr sz="1300">
                 <a:solidFill>
-                  <a:srgbClr val="C8A03C"/>
-                </a:solidFill>
-              </a:defRPr>
-            </a:pPr>
-            <a:r>
-              <a:t>Chapter 8 · Stories</a:t>
-            </a:r>
-          </a:p>
-        </p:txBody>
-      </p:sp>
-      <p:sp>
-        <p:nvSpPr>
-          <p:cNvPr id="4" name="TextBox 3"/>
+                  <a:srgbClr val="333333"/>
+                </a:solidFill>
+              </a:defRPr>
+            </a:pPr>
+            <a:r>
+              <a:t>不像父亲鲧那样用堵截，而是顺水之性，疏通九河，让水自行流入大海。不争之争，是最高明的治理。</a:t>
+            </a:r>
+          </a:p>
+        </p:txBody>
+      </p:sp>
+      <p:sp>
+        <p:nvSpPr>
+          <p:cNvPr id="5" name="Rounded Rectangle 4"/>
+          <p:cNvSpPr/>
+          <p:nvPr/>
+        </p:nvSpPr>
+        <p:spPr>
+          <a:xfrm>
+            <a:off x="457200" y="2743200"/>
+            <a:ext cx="8229600" cy="1371600"/>
+          </a:xfrm>
+          <a:prstGeom prst="roundRect">
+            <a:avLst/>
+          </a:prstGeom>
+          <a:solidFill>
+            <a:srgbClr val="F5F5F0"/>
+          </a:solidFill>
+        </p:spPr>
+        <p:style>
+          <a:lnRef idx="1">
+            <a:schemeClr val="accent1"/>
+          </a:lnRef>
+          <a:fillRef idx="3">
+            <a:schemeClr val="accent1"/>
+          </a:fillRef>
+          <a:effectRef idx="2">
+            <a:schemeClr val="accent1"/>
+          </a:effectRef>
+          <a:fontRef idx="minor">
+            <a:schemeClr val="lt1"/>
+          </a:fontRef>
+        </p:style>
+        <p:txBody>
+          <a:bodyPr rtlCol="0" anchor="ctr" wrap="square"/>
+          <a:lstStyle/>
+          <a:p>
+            <a:pPr algn="ctr">
+              <a:defRPr sz="1600" b="1">
+                <a:solidFill>
+                  <a:srgbClr val="1E3C72"/>
+                </a:solidFill>
+              </a:defRPr>
+            </a:pPr>
+            <a:r>
+              <a:t>【历史人物】曹参的'萧规曹随'</a:t>
+            </a:r>
+          </a:p>
+          <a:p>
+            <a:pPr>
+              <a:defRPr sz="1300">
+                <a:solidFill>
+                  <a:srgbClr val="333333"/>
+                </a:solidFill>
+              </a:defRPr>
+            </a:pPr>
+            <a:r>
+              <a:t>汉相曹参继萧何之后，不折腾、不创新，沿用既有制度。不争功，不炫耀，反而百姓安宁。</a:t>
+            </a:r>
+          </a:p>
+        </p:txBody>
+      </p:sp>
+      <p:sp>
+        <p:nvSpPr>
+          <p:cNvPr id="6" name="Rounded Rectangle 5"/>
+          <p:cNvSpPr/>
+          <p:nvPr/>
+        </p:nvSpPr>
+        <p:spPr>
+          <a:xfrm>
+            <a:off x="457200" y="4206240"/>
+            <a:ext cx="8229600" cy="1371600"/>
+          </a:xfrm>
+          <a:prstGeom prst="roundRect">
+            <a:avLst/>
+          </a:prstGeom>
+          <a:solidFill>
+            <a:srgbClr val="F5F5F0"/>
+          </a:solidFill>
+        </p:spPr>
+        <p:style>
+          <a:lnRef idx="1">
+            <a:schemeClr val="accent1"/>
+          </a:lnRef>
+          <a:fillRef idx="3">
+            <a:schemeClr val="accent1"/>
+          </a:fillRef>
+          <a:effectRef idx="2">
+            <a:schemeClr val="accent1"/>
+          </a:effectRef>
+          <a:fontRef idx="minor">
+            <a:schemeClr val="lt1"/>
+          </a:fontRef>
+        </p:style>
+        <p:txBody>
+          <a:bodyPr rtlCol="0" anchor="ctr" wrap="square"/>
+          <a:lstStyle/>
+          <a:p>
+            <a:pPr algn="ctr">
+              <a:defRPr sz="1600" b="1">
+                <a:solidFill>
+                  <a:srgbClr val="1E3C72"/>
+                </a:solidFill>
+              </a:defRPr>
+            </a:pPr>
+            <a:r>
+              <a:t>【国外案例】圣雄甘地</a:t>
+            </a:r>
+          </a:p>
+          <a:p>
+            <a:pPr>
+              <a:defRPr sz="1300">
+                <a:solidFill>
+                  <a:srgbClr val="333333"/>
+                </a:solidFill>
+              </a:defRPr>
+            </a:pPr>
+            <a:r>
+              <a:t>甘地以'非暴力不合作'抗争，看似柔软如水，却最终瓦解了大英帝国。柔弱胜刚强，不争而天下莫能与之争。</a:t>
+            </a:r>
+          </a:p>
+        </p:txBody>
+      </p:sp>
+      <p:sp>
+        <p:nvSpPr>
+          <p:cNvPr id="7" name="TextBox 6"/>
           <p:cNvSpPr txBox="1"/>
           <p:nvPr/>
         </p:nvSpPr>
         <p:spPr>
           <a:xfrm>
-            <a:off x="457200" y="347472"/>
-            <a:ext cx="8229600" cy="685800"/>
+            <a:off x="8229600" y="6400800"/>
+            <a:ext cx="731520" cy="274320"/>
           </a:xfrm>
           <a:prstGeom prst="rect">
             <a:avLst/>
@@ -6455,394 +5912,15 @@
           </a:bodyPr>
           <a:lstStyle/>
           <a:p>
-            <a:pPr>
-              <a:defRPr sz="2600" b="1">
-                <a:solidFill>
-                  <a:srgbClr val="FFFFFF"/>
-                </a:solidFill>
-              </a:defRPr>
-            </a:pPr>
-            <a:r>
-              <a:t>第8章 · 典故与案例</a:t>
-            </a:r>
-          </a:p>
-        </p:txBody>
-      </p:sp>
-      <p:sp>
-        <p:nvSpPr>
-          <p:cNvPr id="5" name="TextBox 4"/>
-          <p:cNvSpPr txBox="1"/>
-          <p:nvPr/>
-        </p:nvSpPr>
-        <p:spPr>
-          <a:xfrm>
-            <a:off x="0" y="6400800"/>
-            <a:ext cx="9144000" cy="365760"/>
-          </a:xfrm>
-          <a:prstGeom prst="rect">
-            <a:avLst/>
-          </a:prstGeom>
-          <a:noFill/>
-        </p:spPr>
-        <p:txBody>
-          <a:bodyPr wrap="none">
-            <a:spAutoFit/>
-          </a:bodyPr>
-          <a:lstStyle/>
-          <a:p>
-            <a:pPr algn="ctr">
+            <a:pPr algn="r">
               <a:defRPr sz="1000">
                 <a:solidFill>
-                  <a:srgbClr val="B45A28"/>
-                </a:solidFill>
-              </a:defRPr>
-            </a:pPr>
-            <a:r>
-              <a:t>《道德经》打卡学习 · 小燕子 🐦</a:t>
-            </a:r>
-          </a:p>
-        </p:txBody>
-      </p:sp>
-      <p:sp>
-        <p:nvSpPr>
-          <p:cNvPr id="6" name="TextBox 5"/>
-          <p:cNvSpPr txBox="1"/>
-          <p:nvPr/>
-        </p:nvSpPr>
-        <p:spPr>
-          <a:xfrm>
-            <a:off x="365760" y="1"/>
-            <a:ext cx="4114800" cy="731520"/>
-          </a:xfrm>
-          <a:prstGeom prst="rect">
-            <a:avLst/>
-          </a:prstGeom>
-          <a:noFill/>
-        </p:spPr>
-        <p:txBody>
-          <a:bodyPr wrap="square">
-            <a:spAutoFit/>
-          </a:bodyPr>
-          <a:lstStyle/>
-          <a:p>
-            <a:pPr>
-              <a:defRPr sz="1250">
-                <a:solidFill>
-                  <a:srgbClr val="321E0F"/>
-                </a:solidFill>
-              </a:defRPr>
-            </a:pPr>
-            <a:r>
-              <a:t>🏛️ 【中国典故】水利万物而不争</a:t>
-            </a:r>
-          </a:p>
-        </p:txBody>
-      </p:sp>
-      <p:sp>
-        <p:nvSpPr>
-          <p:cNvPr id="7" name="TextBox 6"/>
-          <p:cNvSpPr txBox="1"/>
-          <p:nvPr/>
-        </p:nvSpPr>
-        <p:spPr>
-          <a:xfrm>
-            <a:off x="365760" y="2"/>
-            <a:ext cx="4114800" cy="731520"/>
-          </a:xfrm>
-          <a:prstGeom prst="rect">
-            <a:avLst/>
-          </a:prstGeom>
-          <a:noFill/>
-        </p:spPr>
-        <p:txBody>
-          <a:bodyPr wrap="square">
-            <a:spAutoFit/>
-          </a:bodyPr>
-          <a:lstStyle/>
-          <a:p>
-            <a:pPr>
-              <a:defRPr sz="1250">
-                <a:solidFill>
-                  <a:srgbClr val="321E0F"/>
-                </a:solidFill>
-              </a:defRPr>
-            </a:pPr>
-            <a:r>
-              <a:t>大禹治水：不像父亲鲧那样用堵截，而是顺水之性，疏通九河，让水自行流入大海。不争之争，是最高明的治理。</a:t>
-            </a:r>
-          </a:p>
-        </p:txBody>
-      </p:sp>
-      <p:sp>
-        <p:nvSpPr>
-          <p:cNvPr id="8" name="TextBox 7"/>
-          <p:cNvSpPr txBox="1"/>
-          <p:nvPr/>
-        </p:nvSpPr>
-        <p:spPr>
-          <a:xfrm>
-            <a:off x="365760" y="3"/>
-            <a:ext cx="4114800" cy="731520"/>
-          </a:xfrm>
-          <a:prstGeom prst="rect">
-            <a:avLst/>
-          </a:prstGeom>
-          <a:noFill/>
-        </p:spPr>
-        <p:txBody>
-          <a:bodyPr wrap="square">
-            <a:spAutoFit/>
-          </a:bodyPr>
-          <a:lstStyle/>
-          <a:p>
-            <a:pPr>
-              <a:defRPr sz="1250">
-                <a:solidFill>
-                  <a:srgbClr val="321E0F"/>
-                </a:solidFill>
-              </a:defRPr>
-            </a:pPr>
-          </a:p>
-        </p:txBody>
-      </p:sp>
-      <p:sp>
-        <p:nvSpPr>
-          <p:cNvPr id="9" name="TextBox 8"/>
-          <p:cNvSpPr txBox="1"/>
-          <p:nvPr/>
-        </p:nvSpPr>
-        <p:spPr>
-          <a:xfrm>
-            <a:off x="365760" y="4"/>
-            <a:ext cx="4114800" cy="731520"/>
-          </a:xfrm>
-          <a:prstGeom prst="rect">
-            <a:avLst/>
-          </a:prstGeom>
-          <a:noFill/>
-        </p:spPr>
-        <p:txBody>
-          <a:bodyPr wrap="square">
-            <a:spAutoFit/>
-          </a:bodyPr>
-          <a:lstStyle/>
-          <a:p>
-            <a:pPr>
-              <a:defRPr sz="1250">
-                <a:solidFill>
-                  <a:srgbClr val="321E0F"/>
-                </a:solidFill>
-              </a:defRPr>
-            </a:pPr>
-            <a:r>
-              <a:t>🏛️ 【历史人物】曹参的'萧规曹随'</a:t>
-            </a:r>
-          </a:p>
-        </p:txBody>
-      </p:sp>
-      <p:sp>
-        <p:nvSpPr>
-          <p:cNvPr id="10" name="TextBox 9"/>
-          <p:cNvSpPr txBox="1"/>
-          <p:nvPr/>
-        </p:nvSpPr>
-        <p:spPr>
-          <a:xfrm>
-            <a:off x="365760" y="4"/>
-            <a:ext cx="4114800" cy="731520"/>
-          </a:xfrm>
-          <a:prstGeom prst="rect">
-            <a:avLst/>
-          </a:prstGeom>
-          <a:noFill/>
-        </p:spPr>
-        <p:txBody>
-          <a:bodyPr wrap="square">
-            <a:spAutoFit/>
-          </a:bodyPr>
-          <a:lstStyle/>
-          <a:p>
-            <a:pPr>
-              <a:defRPr sz="1250">
-                <a:solidFill>
-                  <a:srgbClr val="321E0F"/>
-                </a:solidFill>
-              </a:defRPr>
-            </a:pPr>
-            <a:r>
-              <a:t>汉相曹参继萧何之后，不折腾、不创新，沿用既有制度。他说'高祖与萧何定天下，法令即明矣'——不争功，不炫耀，反而百姓安宁。</a:t>
-            </a:r>
-          </a:p>
-        </p:txBody>
-      </p:sp>
-      <p:sp>
-        <p:nvSpPr>
-          <p:cNvPr id="11" name="TextBox 10"/>
-          <p:cNvSpPr txBox="1"/>
-          <p:nvPr/>
-        </p:nvSpPr>
-        <p:spPr>
-          <a:xfrm>
-            <a:off x="4663440" y="1"/>
-            <a:ext cx="4114800" cy="731520"/>
-          </a:xfrm>
-          <a:prstGeom prst="rect">
-            <a:avLst/>
-          </a:prstGeom>
-          <a:noFill/>
-        </p:spPr>
-        <p:txBody>
-          <a:bodyPr wrap="square">
-            <a:spAutoFit/>
-          </a:bodyPr>
-          <a:lstStyle/>
-          <a:p>
-            <a:pPr>
-              <a:defRPr sz="1250">
-                <a:solidFill>
-                  <a:srgbClr val="321E0F"/>
-                </a:solidFill>
-              </a:defRPr>
-            </a:pPr>
-            <a:r>
-              <a:t>🌍 【国外案例】圣雄甘地</a:t>
-            </a:r>
-          </a:p>
-        </p:txBody>
-      </p:sp>
-      <p:sp>
-        <p:nvSpPr>
-          <p:cNvPr id="12" name="TextBox 11"/>
-          <p:cNvSpPr txBox="1"/>
-          <p:nvPr/>
-        </p:nvSpPr>
-        <p:spPr>
-          <a:xfrm>
-            <a:off x="4663440" y="2"/>
-            <a:ext cx="4114800" cy="731520"/>
-          </a:xfrm>
-          <a:prstGeom prst="rect">
-            <a:avLst/>
-          </a:prstGeom>
-          <a:noFill/>
-        </p:spPr>
-        <p:txBody>
-          <a:bodyPr wrap="square">
-            <a:spAutoFit/>
-          </a:bodyPr>
-          <a:lstStyle/>
-          <a:p>
-            <a:pPr>
-              <a:defRPr sz="1250">
-                <a:solidFill>
-                  <a:srgbClr val="321E0F"/>
-                </a:solidFill>
-              </a:defRPr>
-            </a:pPr>
-            <a:r>
-              <a:t>甘地以'非暴力不合作'抗争，看似柔软如水，却最终瓦解了大英帝国。柔弱胜刚强，不争而天下莫能与之争。</a:t>
-            </a:r>
-          </a:p>
-        </p:txBody>
-      </p:sp>
-      <p:sp>
-        <p:nvSpPr>
-          <p:cNvPr id="13" name="TextBox 12"/>
-          <p:cNvSpPr txBox="1"/>
-          <p:nvPr/>
-        </p:nvSpPr>
-        <p:spPr>
-          <a:xfrm>
-            <a:off x="4663440" y="3"/>
-            <a:ext cx="4114800" cy="731520"/>
-          </a:xfrm>
-          <a:prstGeom prst="rect">
-            <a:avLst/>
-          </a:prstGeom>
-          <a:noFill/>
-        </p:spPr>
-        <p:txBody>
-          <a:bodyPr wrap="square">
-            <a:spAutoFit/>
-          </a:bodyPr>
-          <a:lstStyle/>
-          <a:p>
-            <a:pPr>
-              <a:defRPr sz="1250">
-                <a:solidFill>
-                  <a:srgbClr val="321E0F"/>
-                </a:solidFill>
-              </a:defRPr>
-            </a:pPr>
-          </a:p>
-        </p:txBody>
-      </p:sp>
-      <p:sp>
-        <p:nvSpPr>
-          <p:cNvPr id="14" name="TextBox 13"/>
-          <p:cNvSpPr txBox="1"/>
-          <p:nvPr/>
-        </p:nvSpPr>
-        <p:spPr>
-          <a:xfrm>
-            <a:off x="4663440" y="4"/>
-            <a:ext cx="4114800" cy="731520"/>
-          </a:xfrm>
-          <a:prstGeom prst="rect">
-            <a:avLst/>
-          </a:prstGeom>
-          <a:noFill/>
-        </p:spPr>
-        <p:txBody>
-          <a:bodyPr wrap="square">
-            <a:spAutoFit/>
-          </a:bodyPr>
-          <a:lstStyle/>
-          <a:p>
-            <a:pPr>
-              <a:defRPr sz="1250">
-                <a:solidFill>
-                  <a:srgbClr val="321E0F"/>
-                </a:solidFill>
-              </a:defRPr>
-            </a:pPr>
-            <a:r>
-              <a:t>💡 【日常应用】</a:t>
-            </a:r>
-          </a:p>
-        </p:txBody>
-      </p:sp>
-      <p:sp>
-        <p:nvSpPr>
-          <p:cNvPr id="15" name="TextBox 14"/>
-          <p:cNvSpPr txBox="1"/>
-          <p:nvPr/>
-        </p:nvSpPr>
-        <p:spPr>
-          <a:xfrm>
-            <a:off x="4663440" y="4"/>
-            <a:ext cx="4114800" cy="731520"/>
-          </a:xfrm>
-          <a:prstGeom prst="rect">
-            <a:avLst/>
-          </a:prstGeom>
-          <a:noFill/>
-        </p:spPr>
-        <p:txBody>
-          <a:bodyPr wrap="square">
-            <a:spAutoFit/>
-          </a:bodyPr>
-          <a:lstStyle/>
-          <a:p>
-            <a:pPr>
-              <a:defRPr sz="1250">
-                <a:solidFill>
-                  <a:srgbClr val="321E0F"/>
-                </a:solidFill>
-              </a:defRPr>
-            </a:pPr>
-            <a:r>
-              <a:t>遇冲突时，先退一步——不是软弱，而是'居善地'；说话留余地，言出必践——是'言善信'；顺势而为，不强行改变——是'动善时'。</a:t>
+                  <a:srgbClr val="969696"/>
+                </a:solidFill>
+              </a:defRPr>
+            </a:pPr>
+            <a:r>
+              <a:t>6/12</a:t>
             </a:r>
           </a:p>
         </p:txBody>
@@ -6858,14 +5936,6 @@
 <file path=ppt/slides/slide7.xml><?xml version="1.0" encoding="utf-8"?>
 <p:sld xmlns:a="http://schemas.openxmlformats.org/drawingml/2006/main" xmlns:p="http://schemas.openxmlformats.org/presentationml/2006/main" xmlns:r="http://schemas.openxmlformats.org/officeDocument/2006/relationships">
   <p:cSld>
-    <p:bg>
-      <p:bgPr>
-        <a:solidFill>
-          <a:srgbClr val="FCF8EE"/>
-        </a:solidFill>
-        <a:effectLst/>
-      </p:bgPr>
-    </p:bg>
     <p:spTree>
       <p:nvGrpSpPr>
         <p:cNvPr id="1" name=""/>
@@ -6882,13 +5952,13 @@
         <p:spPr>
           <a:xfrm>
             <a:off x="0" y="0"/>
-            <a:ext cx="9144000" cy="1188720"/>
+            <a:ext cx="9144000" cy="1097280"/>
           </a:xfrm>
           <a:prstGeom prst="rect">
             <a:avLst/>
           </a:prstGeom>
           <a:solidFill>
-            <a:srgbClr val="502814"/>
+            <a:srgbClr val="1E3C72"/>
           </a:solidFill>
           <a:ln>
             <a:noFill/>
@@ -6924,8 +5994,8 @@
         </p:nvSpPr>
         <p:spPr>
           <a:xfrm>
-            <a:off x="457200" y="73152"/>
-            <a:ext cx="8229600" cy="411480"/>
+            <a:off x="457200" y="228600"/>
+            <a:ext cx="8229600" cy="731520"/>
           </a:xfrm>
           <a:prstGeom prst="rect">
             <a:avLst/>
@@ -6939,248 +6009,35 @@
           <a:lstStyle/>
           <a:p>
             <a:pPr>
-              <a:defRPr sz="1300">
-                <a:solidFill>
-                  <a:srgbClr val="C8A03C"/>
-                </a:solidFill>
-              </a:defRPr>
-            </a:pPr>
-            <a:r>
-              <a:t>Chapter 8 · Insights</a:t>
-            </a:r>
-          </a:p>
-        </p:txBody>
-      </p:sp>
-      <p:sp>
-        <p:nvSpPr>
-          <p:cNvPr id="4" name="TextBox 3"/>
-          <p:cNvSpPr txBox="1"/>
-          <p:nvPr/>
-        </p:nvSpPr>
-        <p:spPr>
-          <a:xfrm>
-            <a:off x="457200" y="347472"/>
-            <a:ext cx="8229600" cy="685800"/>
-          </a:xfrm>
-          <a:prstGeom prst="rect">
-            <a:avLst/>
-          </a:prstGeom>
-          <a:noFill/>
-        </p:spPr>
-        <p:txBody>
-          <a:bodyPr wrap="none">
-            <a:spAutoFit/>
-          </a:bodyPr>
-          <a:lstStyle/>
-          <a:p>
-            <a:pPr>
-              <a:defRPr sz="2600" b="1">
+              <a:defRPr sz="3200" b="1">
                 <a:solidFill>
                   <a:srgbClr val="FFFFFF"/>
                 </a:solidFill>
               </a:defRPr>
             </a:pPr>
             <a:r>
-              <a:t>第8章 · 精华提炼</a:t>
-            </a:r>
-          </a:p>
-        </p:txBody>
-      </p:sp>
-      <p:sp>
-        <p:nvSpPr>
-          <p:cNvPr id="5" name="TextBox 4"/>
-          <p:cNvSpPr txBox="1"/>
-          <p:nvPr/>
-        </p:nvSpPr>
-        <p:spPr>
-          <a:xfrm>
-            <a:off x="0" y="6400800"/>
-            <a:ext cx="9144000" cy="365760"/>
-          </a:xfrm>
-          <a:prstGeom prst="rect">
-            <a:avLst/>
-          </a:prstGeom>
-          <a:noFill/>
-        </p:spPr>
-        <p:txBody>
-          <a:bodyPr wrap="none">
-            <a:spAutoFit/>
-          </a:bodyPr>
-          <a:lstStyle/>
-          <a:p>
-            <a:pPr algn="ctr">
-              <a:defRPr sz="1000">
-                <a:solidFill>
-                  <a:srgbClr val="B45A28"/>
-                </a:solidFill>
-              </a:defRPr>
-            </a:pPr>
-            <a:r>
-              <a:t>《道德经》打卡学习 · 小燕子 🐦</a:t>
-            </a:r>
-          </a:p>
-        </p:txBody>
-      </p:sp>
-      <p:sp>
-        <p:nvSpPr>
-          <p:cNvPr id="6" name="TextBox 5"/>
-          <p:cNvSpPr txBox="1"/>
-          <p:nvPr/>
-        </p:nvSpPr>
-        <p:spPr>
-          <a:xfrm>
-            <a:off x="731520" y="1"/>
-            <a:ext cx="7680960" cy="731520"/>
-          </a:xfrm>
-          <a:prstGeom prst="rect">
-            <a:avLst/>
-          </a:prstGeom>
-          <a:noFill/>
-        </p:spPr>
-        <p:txBody>
-          <a:bodyPr wrap="square">
-            <a:spAutoFit/>
-          </a:bodyPr>
-          <a:lstStyle/>
-          <a:p>
-            <a:pPr>
-              <a:defRPr sz="1600">
-                <a:solidFill>
-                  <a:srgbClr val="321E0F"/>
-                </a:solidFill>
-              </a:defRPr>
-            </a:pPr>
-            <a:r>
-              <a:t>✅ 核心要义：最高善行如水，不争而利万物，故几于道。</a:t>
-            </a:r>
-          </a:p>
-        </p:txBody>
-      </p:sp>
-      <p:sp>
-        <p:nvSpPr>
-          <p:cNvPr id="7" name="TextBox 6"/>
-          <p:cNvSpPr txBox="1"/>
-          <p:nvPr/>
-        </p:nvSpPr>
-        <p:spPr>
-          <a:xfrm>
-            <a:off x="731520" y="2"/>
-            <a:ext cx="7680960" cy="731520"/>
-          </a:xfrm>
-          <a:prstGeom prst="rect">
-            <a:avLst/>
-          </a:prstGeom>
-          <a:noFill/>
-        </p:spPr>
-        <p:txBody>
-          <a:bodyPr wrap="square">
-            <a:spAutoFit/>
-          </a:bodyPr>
-          <a:lstStyle/>
-          <a:p>
-            <a:pPr>
-              <a:defRPr sz="1600">
-                <a:solidFill>
-                  <a:srgbClr val="321E0F"/>
-                </a:solidFill>
-              </a:defRPr>
-            </a:pPr>
-            <a:r>
-              <a:t>✅ 关键词：上善若水、不争、利万物、七善（居、心、与、言、正、事、动）。</a:t>
-            </a:r>
-          </a:p>
-        </p:txBody>
-      </p:sp>
-      <p:sp>
-        <p:nvSpPr>
-          <p:cNvPr id="8" name="TextBox 7"/>
-          <p:cNvSpPr txBox="1"/>
-          <p:nvPr/>
-        </p:nvSpPr>
-        <p:spPr>
-          <a:xfrm>
-            <a:off x="731520" y="3"/>
-            <a:ext cx="7680960" cy="731520"/>
-          </a:xfrm>
-          <a:prstGeom prst="rect">
-            <a:avLst/>
-          </a:prstGeom>
-          <a:noFill/>
-        </p:spPr>
-        <p:txBody>
-          <a:bodyPr wrap="square">
-            <a:spAutoFit/>
-          </a:bodyPr>
-          <a:lstStyle/>
-          <a:p>
-            <a:pPr>
-              <a:defRPr sz="1600">
-                <a:solidFill>
-                  <a:srgbClr val="321E0F"/>
-                </a:solidFill>
-              </a:defRPr>
-            </a:pPr>
-            <a:r>
-              <a:t>✅ 生活践行：遇事不硬顶，顺势而为；待人不争长短，平和相处。</a:t>
-            </a:r>
-          </a:p>
-        </p:txBody>
-      </p:sp>
-      <p:sp>
-        <p:nvSpPr>
-          <p:cNvPr id="9" name="TextBox 8"/>
-          <p:cNvSpPr txBox="1"/>
-          <p:nvPr/>
-        </p:nvSpPr>
-        <p:spPr>
-          <a:xfrm>
-            <a:off x="731520" y="4"/>
-            <a:ext cx="7680960" cy="731520"/>
-          </a:xfrm>
-          <a:prstGeom prst="rect">
-            <a:avLst/>
-          </a:prstGeom>
-          <a:noFill/>
-        </p:spPr>
-        <p:txBody>
-          <a:bodyPr wrap="square">
-            <a:spAutoFit/>
-          </a:bodyPr>
-          <a:lstStyle/>
-          <a:p>
-            <a:pPr>
-              <a:defRPr sz="1600">
-                <a:solidFill>
-                  <a:srgbClr val="321E0F"/>
-                </a:solidFill>
-              </a:defRPr>
-            </a:pPr>
-            <a:r>
-              <a:t>✅ 商业启示：好的产品如水，润物无声，不强迫用户，自然受欢迎。</a:t>
-            </a:r>
-          </a:p>
-        </p:txBody>
-      </p:sp>
-      <p:sp>
-        <p:nvSpPr>
-          <p:cNvPr id="10" name="Rounded Rectangle 9"/>
+              <a:t>第八章 · 精华提炼</a:t>
+            </a:r>
+          </a:p>
+        </p:txBody>
+      </p:sp>
+      <p:sp>
+        <p:nvSpPr>
+          <p:cNvPr id="4" name="Rounded Rectangle 3"/>
           <p:cNvSpPr/>
           <p:nvPr/>
         </p:nvSpPr>
         <p:spPr>
           <a:xfrm>
-            <a:off x="731520" y="4846320"/>
-            <a:ext cx="7680960" cy="1188720"/>
+            <a:off x="457200" y="1280160"/>
+            <a:ext cx="8229600" cy="914400"/>
           </a:xfrm>
           <a:prstGeom prst="roundRect">
             <a:avLst/>
           </a:prstGeom>
           <a:solidFill>
-            <a:srgbClr val="B45A28"/>
+            <a:srgbClr val="F5F5F0"/>
           </a:solidFill>
-          <a:ln>
-            <a:noFill/>
-          </a:ln>
         </p:spPr>
         <p:style>
           <a:lnRef idx="1">
@@ -7197,23 +6054,228 @@
           </a:fontRef>
         </p:style>
         <p:txBody>
-          <a:bodyPr rtlCol="0" anchor="ctr"/>
-          <a:lstStyle/>
-          <a:p>
-            <a:pPr algn="ctr"/>
-          </a:p>
-        </p:txBody>
-      </p:sp>
-      <p:sp>
-        <p:nvSpPr>
-          <p:cNvPr id="11" name="TextBox 10"/>
+          <a:bodyPr rtlCol="0" anchor="ctr" wrap="square"/>
+          <a:lstStyle/>
+          <a:p>
+            <a:pPr algn="ctr">
+              <a:defRPr sz="1600">
+                <a:solidFill>
+                  <a:srgbClr val="333333"/>
+                </a:solidFill>
+              </a:defRPr>
+            </a:pPr>
+            <a:r>
+              <a:t>• 核心要义：最高善行如水，不争而利万物，故几于道。</a:t>
+            </a:r>
+          </a:p>
+        </p:txBody>
+      </p:sp>
+      <p:sp>
+        <p:nvSpPr>
+          <p:cNvPr id="5" name="Rounded Rectangle 4"/>
+          <p:cNvSpPr/>
+          <p:nvPr/>
+        </p:nvSpPr>
+        <p:spPr>
+          <a:xfrm>
+            <a:off x="457200" y="2286000"/>
+            <a:ext cx="8229600" cy="914400"/>
+          </a:xfrm>
+          <a:prstGeom prst="roundRect">
+            <a:avLst/>
+          </a:prstGeom>
+          <a:solidFill>
+            <a:srgbClr val="F5F5F0"/>
+          </a:solidFill>
+        </p:spPr>
+        <p:style>
+          <a:lnRef idx="1">
+            <a:schemeClr val="accent1"/>
+          </a:lnRef>
+          <a:fillRef idx="3">
+            <a:schemeClr val="accent1"/>
+          </a:fillRef>
+          <a:effectRef idx="2">
+            <a:schemeClr val="accent1"/>
+          </a:effectRef>
+          <a:fontRef idx="minor">
+            <a:schemeClr val="lt1"/>
+          </a:fontRef>
+        </p:style>
+        <p:txBody>
+          <a:bodyPr rtlCol="0" anchor="ctr" wrap="square"/>
+          <a:lstStyle/>
+          <a:p>
+            <a:pPr algn="ctr">
+              <a:defRPr sz="1600">
+                <a:solidFill>
+                  <a:srgbClr val="333333"/>
+                </a:solidFill>
+              </a:defRPr>
+            </a:pPr>
+            <a:r>
+              <a:t>• 关键词：上善若水、不争、利万物、七善（居，心，与，言，正，事，动）。</a:t>
+            </a:r>
+          </a:p>
+        </p:txBody>
+      </p:sp>
+      <p:sp>
+        <p:nvSpPr>
+          <p:cNvPr id="6" name="Rounded Rectangle 5"/>
+          <p:cNvSpPr/>
+          <p:nvPr/>
+        </p:nvSpPr>
+        <p:spPr>
+          <a:xfrm>
+            <a:off x="457200" y="3291840"/>
+            <a:ext cx="8229600" cy="914400"/>
+          </a:xfrm>
+          <a:prstGeom prst="roundRect">
+            <a:avLst/>
+          </a:prstGeom>
+          <a:solidFill>
+            <a:srgbClr val="F5F5F0"/>
+          </a:solidFill>
+        </p:spPr>
+        <p:style>
+          <a:lnRef idx="1">
+            <a:schemeClr val="accent1"/>
+          </a:lnRef>
+          <a:fillRef idx="3">
+            <a:schemeClr val="accent1"/>
+          </a:fillRef>
+          <a:effectRef idx="2">
+            <a:schemeClr val="accent1"/>
+          </a:effectRef>
+          <a:fontRef idx="minor">
+            <a:schemeClr val="lt1"/>
+          </a:fontRef>
+        </p:style>
+        <p:txBody>
+          <a:bodyPr rtlCol="0" anchor="ctr" wrap="square"/>
+          <a:lstStyle/>
+          <a:p>
+            <a:pPr algn="ctr">
+              <a:defRPr sz="1600">
+                <a:solidFill>
+                  <a:srgbClr val="333333"/>
+                </a:solidFill>
+              </a:defRPr>
+            </a:pPr>
+            <a:r>
+              <a:t>• 生活践行：遇事不硬顶，顺势而为；待人不争长短，平和相处。</a:t>
+            </a:r>
+          </a:p>
+        </p:txBody>
+      </p:sp>
+      <p:sp>
+        <p:nvSpPr>
+          <p:cNvPr id="7" name="Rounded Rectangle 6"/>
+          <p:cNvSpPr/>
+          <p:nvPr/>
+        </p:nvSpPr>
+        <p:spPr>
+          <a:xfrm>
+            <a:off x="457200" y="4297680"/>
+            <a:ext cx="8229600" cy="914400"/>
+          </a:xfrm>
+          <a:prstGeom prst="roundRect">
+            <a:avLst/>
+          </a:prstGeom>
+          <a:solidFill>
+            <a:srgbClr val="F5F5F0"/>
+          </a:solidFill>
+        </p:spPr>
+        <p:style>
+          <a:lnRef idx="1">
+            <a:schemeClr val="accent1"/>
+          </a:lnRef>
+          <a:fillRef idx="3">
+            <a:schemeClr val="accent1"/>
+          </a:fillRef>
+          <a:effectRef idx="2">
+            <a:schemeClr val="accent1"/>
+          </a:effectRef>
+          <a:fontRef idx="minor">
+            <a:schemeClr val="lt1"/>
+          </a:fontRef>
+        </p:style>
+        <p:txBody>
+          <a:bodyPr rtlCol="0" anchor="ctr" wrap="square"/>
+          <a:lstStyle/>
+          <a:p>
+            <a:pPr algn="ctr">
+              <a:defRPr sz="1600">
+                <a:solidFill>
+                  <a:srgbClr val="333333"/>
+                </a:solidFill>
+              </a:defRPr>
+            </a:pPr>
+            <a:r>
+              <a:t>• 商业启示：好的产品如水，润物无声，不强迫用户，自然受欢迎。</a:t>
+            </a:r>
+          </a:p>
+        </p:txBody>
+      </p:sp>
+      <p:sp>
+        <p:nvSpPr>
+          <p:cNvPr id="8" name="Rounded Rectangle 7"/>
+          <p:cNvSpPr/>
+          <p:nvPr/>
+        </p:nvSpPr>
+        <p:spPr>
+          <a:xfrm>
+            <a:off x="457200" y="5303520"/>
+            <a:ext cx="8229600" cy="914400"/>
+          </a:xfrm>
+          <a:prstGeom prst="roundRect">
+            <a:avLst/>
+          </a:prstGeom>
+          <a:solidFill>
+            <a:srgbClr val="4682B4"/>
+          </a:solidFill>
+        </p:spPr>
+        <p:style>
+          <a:lnRef idx="1">
+            <a:schemeClr val="accent1"/>
+          </a:lnRef>
+          <a:fillRef idx="3">
+            <a:schemeClr val="accent1"/>
+          </a:fillRef>
+          <a:effectRef idx="2">
+            <a:schemeClr val="accent1"/>
+          </a:effectRef>
+          <a:fontRef idx="minor">
+            <a:schemeClr val="lt1"/>
+          </a:fontRef>
+        </p:style>
+        <p:txBody>
+          <a:bodyPr rtlCol="0" anchor="ctr" wrap="square"/>
+          <a:lstStyle/>
+          <a:p>
+            <a:pPr algn="ctr">
+              <a:defRPr sz="1600">
+                <a:solidFill>
+                  <a:srgbClr val="FFFFFF"/>
+                </a:solidFill>
+              </a:defRPr>
+            </a:pPr>
+            <a:r>
+              <a:t>一句话总结：柔弱胜刚强，不争而无尤——水是道最形象的化身。</a:t>
+            </a:r>
+          </a:p>
+        </p:txBody>
+      </p:sp>
+      <p:sp>
+        <p:nvSpPr>
+          <p:cNvPr id="9" name="TextBox 8"/>
           <p:cNvSpPr txBox="1"/>
           <p:nvPr/>
         </p:nvSpPr>
         <p:spPr>
           <a:xfrm>
-            <a:off x="914400" y="5029200"/>
-            <a:ext cx="7315200" cy="914400"/>
+            <a:off x="8229600" y="6400800"/>
+            <a:ext cx="731520" cy="274320"/>
           </a:xfrm>
           <a:prstGeom prst="rect">
             <a:avLst/>
@@ -7221,20 +6283,20 @@
           <a:noFill/>
         </p:spPr>
         <p:txBody>
-          <a:bodyPr wrap="square">
+          <a:bodyPr wrap="none">
             <a:spAutoFit/>
           </a:bodyPr>
           <a:lstStyle/>
           <a:p>
-            <a:pPr algn="ctr">
-              <a:defRPr sz="1600">
-                <a:solidFill>
-                  <a:srgbClr val="FFFFFF"/>
-                </a:solidFill>
-              </a:defRPr>
-            </a:pPr>
-            <a:r>
-              <a:t>💡 一句话总结：柔弱胜刚强，不争而无尤——水是道最形象的化身。</a:t>
+            <a:pPr algn="r">
+              <a:defRPr sz="1000">
+                <a:solidFill>
+                  <a:srgbClr val="969696"/>
+                </a:solidFill>
+              </a:defRPr>
+            </a:pPr>
+            <a:r>
+              <a:t>7/12</a:t>
             </a:r>
           </a:p>
         </p:txBody>
@@ -7250,14 +6312,6 @@
 <file path=ppt/slides/slide8.xml><?xml version="1.0" encoding="utf-8"?>
 <p:sld xmlns:a="http://schemas.openxmlformats.org/drawingml/2006/main" xmlns:p="http://schemas.openxmlformats.org/presentationml/2006/main" xmlns:r="http://schemas.openxmlformats.org/officeDocument/2006/relationships">
   <p:cSld>
-    <p:bg>
-      <p:bgPr>
-        <a:solidFill>
-          <a:srgbClr val="FCF8EE"/>
-        </a:solidFill>
-        <a:effectLst/>
-      </p:bgPr>
-    </p:bg>
     <p:spTree>
       <p:nvGrpSpPr>
         <p:cNvPr id="1" name=""/>
@@ -7274,13 +6328,13 @@
         <p:spPr>
           <a:xfrm>
             <a:off x="0" y="0"/>
-            <a:ext cx="9144000" cy="1188720"/>
+            <a:ext cx="9144000" cy="1097280"/>
           </a:xfrm>
           <a:prstGeom prst="rect">
             <a:avLst/>
           </a:prstGeom>
           <a:solidFill>
-            <a:srgbClr val="502814"/>
+            <a:srgbClr val="1E3C72"/>
           </a:solidFill>
           <a:ln>
             <a:noFill/>
@@ -7316,8 +6370,8 @@
         </p:nvSpPr>
         <p:spPr>
           <a:xfrm>
-            <a:off x="457200" y="73152"/>
-            <a:ext cx="8229600" cy="411480"/>
+            <a:off x="457200" y="228600"/>
+            <a:ext cx="8229600" cy="731520"/>
           </a:xfrm>
           <a:prstGeom prst="rect">
             <a:avLst/>
@@ -7331,110 +6385,35 @@
           <a:lstStyle/>
           <a:p>
             <a:pPr>
-              <a:defRPr sz="1300">
-                <a:solidFill>
-                  <a:srgbClr val="C8A03C"/>
-                </a:solidFill>
-              </a:defRPr>
-            </a:pPr>
-            <a:r>
-              <a:t>Chapter 9</a:t>
-            </a:r>
-          </a:p>
-        </p:txBody>
-      </p:sp>
-      <p:sp>
-        <p:nvSpPr>
-          <p:cNvPr id="4" name="TextBox 3"/>
-          <p:cNvSpPr txBox="1"/>
-          <p:nvPr/>
-        </p:nvSpPr>
-        <p:spPr>
-          <a:xfrm>
-            <a:off x="457200" y="347472"/>
-            <a:ext cx="8229600" cy="685800"/>
-          </a:xfrm>
-          <a:prstGeom prst="rect">
-            <a:avLst/>
-          </a:prstGeom>
-          <a:noFill/>
-        </p:spPr>
-        <p:txBody>
-          <a:bodyPr wrap="none">
-            <a:spAutoFit/>
-          </a:bodyPr>
-          <a:lstStyle/>
-          <a:p>
-            <a:pPr>
-              <a:defRPr sz="2600" b="1">
+              <a:defRPr sz="3200" b="1">
                 <a:solidFill>
                   <a:srgbClr val="FFFFFF"/>
                 </a:solidFill>
               </a:defRPr>
             </a:pPr>
             <a:r>
-              <a:t>第9章 · 功遂身退</a:t>
-            </a:r>
-          </a:p>
-        </p:txBody>
-      </p:sp>
-      <p:sp>
-        <p:nvSpPr>
-          <p:cNvPr id="5" name="TextBox 4"/>
-          <p:cNvSpPr txBox="1"/>
-          <p:nvPr/>
-        </p:nvSpPr>
-        <p:spPr>
-          <a:xfrm>
-            <a:off x="0" y="6400800"/>
-            <a:ext cx="9144000" cy="365760"/>
-          </a:xfrm>
-          <a:prstGeom prst="rect">
-            <a:avLst/>
-          </a:prstGeom>
-          <a:noFill/>
-        </p:spPr>
-        <p:txBody>
-          <a:bodyPr wrap="none">
-            <a:spAutoFit/>
-          </a:bodyPr>
-          <a:lstStyle/>
-          <a:p>
-            <a:pPr algn="ctr">
-              <a:defRPr sz="1000">
-                <a:solidFill>
-                  <a:srgbClr val="B45A28"/>
-                </a:solidFill>
-              </a:defRPr>
-            </a:pPr>
-            <a:r>
-              <a:t>《道德经》打卡学习 · 小燕子 🐦</a:t>
-            </a:r>
-          </a:p>
-        </p:txBody>
-      </p:sp>
-      <p:sp>
-        <p:nvSpPr>
-          <p:cNvPr id="6" name="Rounded Rectangle 5"/>
+              <a:t>第九章 · 功遂身退</a:t>
+            </a:r>
+          </a:p>
+        </p:txBody>
+      </p:sp>
+      <p:sp>
+        <p:nvSpPr>
+          <p:cNvPr id="4" name="Rounded Rectangle 3"/>
           <p:cNvSpPr/>
           <p:nvPr/>
         </p:nvSpPr>
         <p:spPr>
           <a:xfrm>
-            <a:off x="457200" y="1371600"/>
-            <a:ext cx="8229600" cy="1463040"/>
+            <a:off x="457200" y="1280160"/>
+            <a:ext cx="8229600" cy="2011680"/>
           </a:xfrm>
           <a:prstGeom prst="roundRect">
             <a:avLst/>
           </a:prstGeom>
           <a:solidFill>
-            <a:srgbClr val="F0E8DA"/>
+            <a:srgbClr val="F5F5F0"/>
           </a:solidFill>
-          <a:ln>
-            <a:solidFill>
-              <a:srgbClr val="C8A03C"/>
-            </a:solidFill>
-          </a:ln>
         </p:spPr>
         <p:style>
           <a:lnRef idx="1">
@@ -7451,23 +6430,77 @@
           </a:fontRef>
         </p:style>
         <p:txBody>
-          <a:bodyPr rtlCol="0" anchor="ctr"/>
-          <a:lstStyle/>
-          <a:p>
-            <a:pPr algn="ctr"/>
-          </a:p>
-        </p:txBody>
-      </p:sp>
-      <p:sp>
-        <p:nvSpPr>
-          <p:cNvPr id="7" name="TextBox 6"/>
+          <a:bodyPr rtlCol="0" anchor="ctr" wrap="square"/>
+          <a:lstStyle/>
+          <a:p>
+            <a:pPr algn="ctr">
+              <a:defRPr sz="1800" b="1">
+                <a:solidFill>
+                  <a:srgbClr val="1E3C72"/>
+                </a:solidFill>
+              </a:defRPr>
+            </a:pPr>
+            <a:r>
+              <a:t>【原文】</a:t>
+            </a:r>
+          </a:p>
+          <a:p>
+            <a:pPr>
+              <a:spcBef>
+                <a:spcPts val="400"/>
+              </a:spcBef>
+              <a:defRPr sz="1800">
+                <a:solidFill>
+                  <a:srgbClr val="333333"/>
+                </a:solidFill>
+              </a:defRPr>
+            </a:pPr>
+            <a:r>
+              <a:t>持而盈之，不如其已。揣而锐之，不可长保。</a:t>
+            </a:r>
+          </a:p>
+          <a:p>
+            <a:pPr>
+              <a:spcBef>
+                <a:spcPts val="400"/>
+              </a:spcBef>
+              <a:defRPr sz="1800">
+                <a:solidFill>
+                  <a:srgbClr val="333333"/>
+                </a:solidFill>
+              </a:defRPr>
+            </a:pPr>
+            <a:r>
+              <a:t>金玉满堂，莫之能守。富贵而骄，自遗其咎。</a:t>
+            </a:r>
+          </a:p>
+          <a:p>
+            <a:pPr>
+              <a:spcBef>
+                <a:spcPts val="400"/>
+              </a:spcBef>
+              <a:defRPr sz="1800">
+                <a:solidFill>
+                  <a:srgbClr val="333333"/>
+                </a:solidFill>
+              </a:defRPr>
+            </a:pPr>
+            <a:r>
+              <a:t>功遂身退，天之道。</a:t>
+            </a:r>
+          </a:p>
+        </p:txBody>
+      </p:sp>
+      <p:sp>
+        <p:nvSpPr>
+          <p:cNvPr id="5" name="TextBox 4"/>
           <p:cNvSpPr txBox="1"/>
           <p:nvPr/>
         </p:nvSpPr>
         <p:spPr>
           <a:xfrm>
-            <a:off x="731520" y="1463040"/>
-            <a:ext cx="7680960" cy="1280160"/>
+            <a:off x="457200" y="3474720"/>
+            <a:ext cx="8229600" cy="3200400"/>
           </a:xfrm>
           <a:prstGeom prst="rect">
             <a:avLst/>
@@ -7481,28 +6514,88 @@
           <a:lstStyle/>
           <a:p>
             <a:pPr>
-              <a:defRPr sz="1500">
-                <a:solidFill>
-                  <a:srgbClr val="502814"/>
-                </a:solidFill>
-              </a:defRPr>
-            </a:pPr>
-            <a:r>
-              <a:t>持而盈之，不如其已。揣而锐之，不可长保。金玉满堂，莫之能守。富贵而骄，自遗其咎。功遂身退，天之道。</a:t>
-            </a:r>
-          </a:p>
-        </p:txBody>
-      </p:sp>
-      <p:sp>
-        <p:nvSpPr>
-          <p:cNvPr id="8" name="TextBox 7"/>
+              <a:defRPr sz="1800" b="1">
+                <a:solidFill>
+                  <a:srgbClr val="1E3C72"/>
+                </a:solidFill>
+              </a:defRPr>
+            </a:pPr>
+            <a:r>
+              <a:t>【白话解读】</a:t>
+            </a:r>
+          </a:p>
+          <a:p>
+            <a:pPr>
+              <a:spcBef>
+                <a:spcPts val="600"/>
+              </a:spcBef>
+              <a:defRPr sz="1400">
+                <a:solidFill>
+                  <a:srgbClr val="333333"/>
+                </a:solidFill>
+              </a:defRPr>
+            </a:pPr>
+            <a:r>
+              <a:t>• 持盈揣锐：执持盈满，不如及时停止；磨砺锋芒，难以长久保持。</a:t>
+            </a:r>
+          </a:p>
+          <a:p>
+            <a:pPr>
+              <a:spcBef>
+                <a:spcPts val="600"/>
+              </a:spcBef>
+              <a:defRPr sz="1400">
+                <a:solidFill>
+                  <a:srgbClr val="333333"/>
+                </a:solidFill>
+              </a:defRPr>
+            </a:pPr>
+            <a:r>
+              <a:t>• 金玉满堂：金玉满堂，无法守得住；富贵而骄，必自留祸患。</a:t>
+            </a:r>
+          </a:p>
+          <a:p>
+            <a:pPr>
+              <a:spcBef>
+                <a:spcPts val="600"/>
+              </a:spcBef>
+              <a:defRPr sz="1400">
+                <a:solidFill>
+                  <a:srgbClr val="333333"/>
+                </a:solidFill>
+              </a:defRPr>
+            </a:pPr>
+            <a:r>
+              <a:t>• 功遂身退：功成业就之后，全身而退——这是自然天道运行的法则。</a:t>
+            </a:r>
+          </a:p>
+          <a:p>
+            <a:pPr>
+              <a:spcBef>
+                <a:spcPts val="600"/>
+              </a:spcBef>
+              <a:defRPr sz="1400">
+                <a:solidFill>
+                  <a:srgbClr val="333333"/>
+                </a:solidFill>
+              </a:defRPr>
+            </a:pPr>
+            <a:r>
+              <a:t>• 核心警示：贪多求全、锋芒毕露、富贵而骄——三者皆为取祸之道。</a:t>
+            </a:r>
+          </a:p>
+        </p:txBody>
+      </p:sp>
+      <p:sp>
+        <p:nvSpPr>
+          <p:cNvPr id="6" name="TextBox 5"/>
           <p:cNvSpPr txBox="1"/>
           <p:nvPr/>
         </p:nvSpPr>
         <p:spPr>
           <a:xfrm>
-            <a:off x="731520" y="3"/>
-            <a:ext cx="7680960" cy="685800"/>
+            <a:off x="8229600" y="6400800"/>
+            <a:ext cx="731520" cy="274320"/>
           </a:xfrm>
           <a:prstGeom prst="rect">
             <a:avLst/>
@@ -7510,125 +6603,20 @@
           <a:noFill/>
         </p:spPr>
         <p:txBody>
-          <a:bodyPr wrap="square">
+          <a:bodyPr wrap="none">
             <a:spAutoFit/>
           </a:bodyPr>
           <a:lstStyle/>
           <a:p>
-            <a:pPr>
-              <a:defRPr sz="1400">
-                <a:solidFill>
-                  <a:srgbClr val="321E0F"/>
-                </a:solidFill>
-              </a:defRPr>
-            </a:pPr>
-            <a:r>
-              <a:t>📜 执持盈满，不如及时停止；磨砺锋芒，难以长久保持。</a:t>
-            </a:r>
-          </a:p>
-        </p:txBody>
-      </p:sp>
-      <p:sp>
-        <p:nvSpPr>
-          <p:cNvPr id="9" name="TextBox 8"/>
-          <p:cNvSpPr txBox="1"/>
-          <p:nvPr/>
-        </p:nvSpPr>
-        <p:spPr>
-          <a:xfrm>
-            <a:off x="731520" y="4"/>
-            <a:ext cx="7680960" cy="685800"/>
-          </a:xfrm>
-          <a:prstGeom prst="rect">
-            <a:avLst/>
-          </a:prstGeom>
-          <a:noFill/>
-        </p:spPr>
-        <p:txBody>
-          <a:bodyPr wrap="square">
-            <a:spAutoFit/>
-          </a:bodyPr>
-          <a:lstStyle/>
-          <a:p>
-            <a:pPr>
-              <a:defRPr sz="1400">
-                <a:solidFill>
-                  <a:srgbClr val="321E0F"/>
-                </a:solidFill>
-              </a:defRPr>
-            </a:pPr>
-            <a:r>
-              <a:t>📜 金玉满堂，无法守得住；富贵而骄，必自留祸患。</a:t>
-            </a:r>
-          </a:p>
-        </p:txBody>
-      </p:sp>
-      <p:sp>
-        <p:nvSpPr>
-          <p:cNvPr id="10" name="TextBox 9"/>
-          <p:cNvSpPr txBox="1"/>
-          <p:nvPr/>
-        </p:nvSpPr>
-        <p:spPr>
-          <a:xfrm>
-            <a:off x="731520" y="5"/>
-            <a:ext cx="7680960" cy="685800"/>
-          </a:xfrm>
-          <a:prstGeom prst="rect">
-            <a:avLst/>
-          </a:prstGeom>
-          <a:noFill/>
-        </p:spPr>
-        <p:txBody>
-          <a:bodyPr wrap="square">
-            <a:spAutoFit/>
-          </a:bodyPr>
-          <a:lstStyle/>
-          <a:p>
-            <a:pPr>
-              <a:defRPr sz="1400">
-                <a:solidFill>
-                  <a:srgbClr val="321E0F"/>
-                </a:solidFill>
-              </a:defRPr>
-            </a:pPr>
-            <a:r>
-              <a:t>📜 功成业就之后，全身而退——这是自然天道运行的法则。</a:t>
-            </a:r>
-          </a:p>
-        </p:txBody>
-      </p:sp>
-      <p:sp>
-        <p:nvSpPr>
-          <p:cNvPr id="11" name="TextBox 10"/>
-          <p:cNvSpPr txBox="1"/>
-          <p:nvPr/>
-        </p:nvSpPr>
-        <p:spPr>
-          <a:xfrm>
-            <a:off x="731520" y="5"/>
-            <a:ext cx="7680960" cy="685800"/>
-          </a:xfrm>
-          <a:prstGeom prst="rect">
-            <a:avLst/>
-          </a:prstGeom>
-          <a:noFill/>
-        </p:spPr>
-        <p:txBody>
-          <a:bodyPr wrap="square">
-            <a:spAutoFit/>
-          </a:bodyPr>
-          <a:lstStyle/>
-          <a:p>
-            <a:pPr>
-              <a:defRPr sz="1400">
-                <a:solidFill>
-                  <a:srgbClr val="321E0F"/>
-                </a:solidFill>
-              </a:defRPr>
-            </a:pPr>
-            <a:r>
-              <a:t>📜 核心警示：贪多求全、锋芒毕露、富贵而骄——三者皆为取祸之道。</a:t>
+            <a:pPr algn="r">
+              <a:defRPr sz="1000">
+                <a:solidFill>
+                  <a:srgbClr val="969696"/>
+                </a:solidFill>
+              </a:defRPr>
+            </a:pPr>
+            <a:r>
+              <a:t>8/12</a:t>
             </a:r>
           </a:p>
         </p:txBody>
@@ -7644,14 +6632,6 @@
 <file path=ppt/slides/slide9.xml><?xml version="1.0" encoding="utf-8"?>
 <p:sld xmlns:a="http://schemas.openxmlformats.org/drawingml/2006/main" xmlns:p="http://schemas.openxmlformats.org/presentationml/2006/main" xmlns:r="http://schemas.openxmlformats.org/officeDocument/2006/relationships">
   <p:cSld>
-    <p:bg>
-      <p:bgPr>
-        <a:solidFill>
-          <a:srgbClr val="FCF8EE"/>
-        </a:solidFill>
-        <a:effectLst/>
-      </p:bgPr>
-    </p:bg>
     <p:spTree>
       <p:nvGrpSpPr>
         <p:cNvPr id="1" name=""/>
@@ -7668,13 +6648,13 @@
         <p:spPr>
           <a:xfrm>
             <a:off x="0" y="0"/>
-            <a:ext cx="9144000" cy="1188720"/>
+            <a:ext cx="9144000" cy="1097280"/>
           </a:xfrm>
           <a:prstGeom prst="rect">
             <a:avLst/>
           </a:prstGeom>
           <a:solidFill>
-            <a:srgbClr val="502814"/>
+            <a:srgbClr val="1E3C72"/>
           </a:solidFill>
           <a:ln>
             <a:noFill/>
@@ -7710,8 +6690,8 @@
         </p:nvSpPr>
         <p:spPr>
           <a:xfrm>
-            <a:off x="457200" y="73152"/>
-            <a:ext cx="8229600" cy="411480"/>
+            <a:off x="457200" y="228600"/>
+            <a:ext cx="8229600" cy="731520"/>
           </a:xfrm>
           <a:prstGeom prst="rect">
             <a:avLst/>
@@ -7725,28 +6705,211 @@
           <a:lstStyle/>
           <a:p>
             <a:pPr>
+              <a:defRPr sz="3200" b="1">
+                <a:solidFill>
+                  <a:srgbClr val="FFFFFF"/>
+                </a:solidFill>
+              </a:defRPr>
+            </a:pPr>
+            <a:r>
+              <a:t>第九章 · 典故与案例</a:t>
+            </a:r>
+          </a:p>
+        </p:txBody>
+      </p:sp>
+      <p:sp>
+        <p:nvSpPr>
+          <p:cNvPr id="4" name="Rounded Rectangle 3"/>
+          <p:cNvSpPr/>
+          <p:nvPr/>
+        </p:nvSpPr>
+        <p:spPr>
+          <a:xfrm>
+            <a:off x="457200" y="1280160"/>
+            <a:ext cx="8229600" cy="1371600"/>
+          </a:xfrm>
+          <a:prstGeom prst="roundRect">
+            <a:avLst/>
+          </a:prstGeom>
+          <a:solidFill>
+            <a:srgbClr val="F5F5F0"/>
+          </a:solidFill>
+        </p:spPr>
+        <p:style>
+          <a:lnRef idx="1">
+            <a:schemeClr val="accent1"/>
+          </a:lnRef>
+          <a:fillRef idx="3">
+            <a:schemeClr val="accent1"/>
+          </a:fillRef>
+          <a:effectRef idx="2">
+            <a:schemeClr val="accent1"/>
+          </a:effectRef>
+          <a:fontRef idx="minor">
+            <a:schemeClr val="lt1"/>
+          </a:fontRef>
+        </p:style>
+        <p:txBody>
+          <a:bodyPr rtlCol="0" anchor="ctr" wrap="square"/>
+          <a:lstStyle/>
+          <a:p>
+            <a:pPr algn="ctr">
+              <a:defRPr sz="1600" b="1">
+                <a:solidFill>
+                  <a:srgbClr val="1E3C72"/>
+                </a:solidFill>
+              </a:defRPr>
+            </a:pPr>
+            <a:r>
+              <a:t>【中国典故】范蠡功成身退</a:t>
+            </a:r>
+          </a:p>
+          <a:p>
+            <a:pPr>
               <a:defRPr sz="1300">
                 <a:solidFill>
-                  <a:srgbClr val="C8A03C"/>
-                </a:solidFill>
-              </a:defRPr>
-            </a:pPr>
-            <a:r>
-              <a:t>Chapter 9 · Stories</a:t>
-            </a:r>
-          </a:p>
-        </p:txBody>
-      </p:sp>
-      <p:sp>
-        <p:nvSpPr>
-          <p:cNvPr id="4" name="TextBox 3"/>
+                  <a:srgbClr val="333333"/>
+                </a:solidFill>
+              </a:defRPr>
+            </a:pPr>
+            <a:r>
+              <a:t>越王灭吴后，范蠡深知'蜚鸟尽，良弓藏'之理，主动泛舟五湖。而文种不听劝，终被勾践赐死。功成身退，保全性命；贪恋权位，祸及其身。</a:t>
+            </a:r>
+          </a:p>
+        </p:txBody>
+      </p:sp>
+      <p:sp>
+        <p:nvSpPr>
+          <p:cNvPr id="5" name="Rounded Rectangle 4"/>
+          <p:cNvSpPr/>
+          <p:nvPr/>
+        </p:nvSpPr>
+        <p:spPr>
+          <a:xfrm>
+            <a:off x="457200" y="2743200"/>
+            <a:ext cx="8229600" cy="1371600"/>
+          </a:xfrm>
+          <a:prstGeom prst="roundRect">
+            <a:avLst/>
+          </a:prstGeom>
+          <a:solidFill>
+            <a:srgbClr val="F5F5F0"/>
+          </a:solidFill>
+        </p:spPr>
+        <p:style>
+          <a:lnRef idx="1">
+            <a:schemeClr val="accent1"/>
+          </a:lnRef>
+          <a:fillRef idx="3">
+            <a:schemeClr val="accent1"/>
+          </a:fillRef>
+          <a:effectRef idx="2">
+            <a:schemeClr val="accent1"/>
+          </a:effectRef>
+          <a:fontRef idx="minor">
+            <a:schemeClr val="lt1"/>
+          </a:fontRef>
+        </p:style>
+        <p:txBody>
+          <a:bodyPr rtlCol="0" anchor="ctr" wrap="square"/>
+          <a:lstStyle/>
+          <a:p>
+            <a:pPr algn="ctr">
+              <a:defRPr sz="1600" b="1">
+                <a:solidFill>
+                  <a:srgbClr val="1E3C72"/>
+                </a:solidFill>
+              </a:defRPr>
+            </a:pPr>
+            <a:r>
+              <a:t>【曾国藩的智慧</a:t>
+            </a:r>
+          </a:p>
+          <a:p>
+            <a:pPr>
+              <a:defRPr sz="1300">
+                <a:solidFill>
+                  <a:srgbClr val="333333"/>
+                </a:solidFill>
+              </a:defRPr>
+            </a:pPr>
+            <a:r>
+              <a:t>曾国藩平定太平天国后，主动削减湘军，裁撤万余兵力，向朝廷表明无政治野心。正是这份'功遂身退'的清醒，保全了自身与家族。</a:t>
+            </a:r>
+          </a:p>
+        </p:txBody>
+      </p:sp>
+      <p:sp>
+        <p:nvSpPr>
+          <p:cNvPr id="6" name="Rounded Rectangle 5"/>
+          <p:cNvSpPr/>
+          <p:nvPr/>
+        </p:nvSpPr>
+        <p:spPr>
+          <a:xfrm>
+            <a:off x="457200" y="4206240"/>
+            <a:ext cx="8229600" cy="1371600"/>
+          </a:xfrm>
+          <a:prstGeom prst="roundRect">
+            <a:avLst/>
+          </a:prstGeom>
+          <a:solidFill>
+            <a:srgbClr val="F5F5F0"/>
+          </a:solidFill>
+        </p:spPr>
+        <p:style>
+          <a:lnRef idx="1">
+            <a:schemeClr val="accent1"/>
+          </a:lnRef>
+          <a:fillRef idx="3">
+            <a:schemeClr val="accent1"/>
+          </a:fillRef>
+          <a:effectRef idx="2">
+            <a:schemeClr val="accent1"/>
+          </a:effectRef>
+          <a:fontRef idx="minor">
+            <a:schemeClr val="lt1"/>
+          </a:fontRef>
+        </p:style>
+        <p:txBody>
+          <a:bodyPr rtlCol="0" anchor="ctr" wrap="square"/>
+          <a:lstStyle/>
+          <a:p>
+            <a:pPr algn="ctr">
+              <a:defRPr sz="1600" b="1">
+                <a:solidFill>
+                  <a:srgbClr val="1E3C72"/>
+                </a:solidFill>
+              </a:defRPr>
+            </a:pPr>
+            <a:r>
+              <a:t>【国外案例】诺贝尔的明智选择</a:t>
+            </a:r>
+          </a:p>
+          <a:p>
+            <a:pPr>
+              <a:defRPr sz="1300">
+                <a:solidFill>
+                  <a:srgbClr val="333333"/>
+                </a:solidFill>
+              </a:defRPr>
+            </a:pPr>
+            <a:r>
+              <a:t>诺贝尔在世时将大部分财产设立和平奖，功成之后不将财富留给子孙，而是回馈社会。他的名字因此永垂不朽。</a:t>
+            </a:r>
+          </a:p>
+        </p:txBody>
+      </p:sp>
+      <p:sp>
+        <p:nvSpPr>
+          <p:cNvPr id="7" name="TextBox 6"/>
           <p:cNvSpPr txBox="1"/>
           <p:nvPr/>
         </p:nvSpPr>
         <p:spPr>
           <a:xfrm>
-            <a:off x="457200" y="347472"/>
-            <a:ext cx="8229600" cy="685800"/>
+            <a:off x="8229600" y="6400800"/>
+            <a:ext cx="731520" cy="274320"/>
           </a:xfrm>
           <a:prstGeom prst="rect">
             <a:avLst/>
@@ -7759,394 +6922,15 @@
           </a:bodyPr>
           <a:lstStyle/>
           <a:p>
-            <a:pPr>
-              <a:defRPr sz="2600" b="1">
-                <a:solidFill>
-                  <a:srgbClr val="FFFFFF"/>
-                </a:solidFill>
-              </a:defRPr>
-            </a:pPr>
-            <a:r>
-              <a:t>第9章 · 典故与案例</a:t>
-            </a:r>
-          </a:p>
-        </p:txBody>
-      </p:sp>
-      <p:sp>
-        <p:nvSpPr>
-          <p:cNvPr id="5" name="TextBox 4"/>
-          <p:cNvSpPr txBox="1"/>
-          <p:nvPr/>
-        </p:nvSpPr>
-        <p:spPr>
-          <a:xfrm>
-            <a:off x="0" y="6400800"/>
-            <a:ext cx="9144000" cy="365760"/>
-          </a:xfrm>
-          <a:prstGeom prst="rect">
-            <a:avLst/>
-          </a:prstGeom>
-          <a:noFill/>
-        </p:spPr>
-        <p:txBody>
-          <a:bodyPr wrap="none">
-            <a:spAutoFit/>
-          </a:bodyPr>
-          <a:lstStyle/>
-          <a:p>
-            <a:pPr algn="ctr">
+            <a:pPr algn="r">
               <a:defRPr sz="1000">
                 <a:solidFill>
-                  <a:srgbClr val="B45A28"/>
-                </a:solidFill>
-              </a:defRPr>
-            </a:pPr>
-            <a:r>
-              <a:t>《道德经》打卡学习 · 小燕子 🐦</a:t>
-            </a:r>
-          </a:p>
-        </p:txBody>
-      </p:sp>
-      <p:sp>
-        <p:nvSpPr>
-          <p:cNvPr id="6" name="TextBox 5"/>
-          <p:cNvSpPr txBox="1"/>
-          <p:nvPr/>
-        </p:nvSpPr>
-        <p:spPr>
-          <a:xfrm>
-            <a:off x="365760" y="1"/>
-            <a:ext cx="4114800" cy="731520"/>
-          </a:xfrm>
-          <a:prstGeom prst="rect">
-            <a:avLst/>
-          </a:prstGeom>
-          <a:noFill/>
-        </p:spPr>
-        <p:txBody>
-          <a:bodyPr wrap="square">
-            <a:spAutoFit/>
-          </a:bodyPr>
-          <a:lstStyle/>
-          <a:p>
-            <a:pPr>
-              <a:defRPr sz="1250">
-                <a:solidFill>
-                  <a:srgbClr val="321E0F"/>
-                </a:solidFill>
-              </a:defRPr>
-            </a:pPr>
-            <a:r>
-              <a:t>🏛️ 【中国典故】范蠡功成身退</a:t>
-            </a:r>
-          </a:p>
-        </p:txBody>
-      </p:sp>
-      <p:sp>
-        <p:nvSpPr>
-          <p:cNvPr id="7" name="TextBox 6"/>
-          <p:cNvSpPr txBox="1"/>
-          <p:nvPr/>
-        </p:nvSpPr>
-        <p:spPr>
-          <a:xfrm>
-            <a:off x="365760" y="2"/>
-            <a:ext cx="4114800" cy="731520"/>
-          </a:xfrm>
-          <a:prstGeom prst="rect">
-            <a:avLst/>
-          </a:prstGeom>
-          <a:noFill/>
-        </p:spPr>
-        <p:txBody>
-          <a:bodyPr wrap="square">
-            <a:spAutoFit/>
-          </a:bodyPr>
-          <a:lstStyle/>
-          <a:p>
-            <a:pPr>
-              <a:defRPr sz="1250">
-                <a:solidFill>
-                  <a:srgbClr val="321E0F"/>
-                </a:solidFill>
-              </a:defRPr>
-            </a:pPr>
-            <a:r>
-              <a:t>越王灭吴后，范蠡深知'蜚鸟尽，良弓藏'之理，主动泛舟五湖。而文种不听劝，终被勾践赐死。功成身退，保全性命；贪恋权位，祸及其身。</a:t>
-            </a:r>
-          </a:p>
-        </p:txBody>
-      </p:sp>
-      <p:sp>
-        <p:nvSpPr>
-          <p:cNvPr id="8" name="TextBox 7"/>
-          <p:cNvSpPr txBox="1"/>
-          <p:nvPr/>
-        </p:nvSpPr>
-        <p:spPr>
-          <a:xfrm>
-            <a:off x="365760" y="3"/>
-            <a:ext cx="4114800" cy="731520"/>
-          </a:xfrm>
-          <a:prstGeom prst="rect">
-            <a:avLst/>
-          </a:prstGeom>
-          <a:noFill/>
-        </p:spPr>
-        <p:txBody>
-          <a:bodyPr wrap="square">
-            <a:spAutoFit/>
-          </a:bodyPr>
-          <a:lstStyle/>
-          <a:p>
-            <a:pPr>
-              <a:defRPr sz="1250">
-                <a:solidFill>
-                  <a:srgbClr val="321E0F"/>
-                </a:solidFill>
-              </a:defRPr>
-            </a:pPr>
-          </a:p>
-        </p:txBody>
-      </p:sp>
-      <p:sp>
-        <p:nvSpPr>
-          <p:cNvPr id="9" name="TextBox 8"/>
-          <p:cNvSpPr txBox="1"/>
-          <p:nvPr/>
-        </p:nvSpPr>
-        <p:spPr>
-          <a:xfrm>
-            <a:off x="365760" y="4"/>
-            <a:ext cx="4114800" cy="731520"/>
-          </a:xfrm>
-          <a:prstGeom prst="rect">
-            <a:avLst/>
-          </a:prstGeom>
-          <a:noFill/>
-        </p:spPr>
-        <p:txBody>
-          <a:bodyPr wrap="square">
-            <a:spAutoFit/>
-          </a:bodyPr>
-          <a:lstStyle/>
-          <a:p>
-            <a:pPr>
-              <a:defRPr sz="1250">
-                <a:solidFill>
-                  <a:srgbClr val="321E0F"/>
-                </a:solidFill>
-              </a:defRPr>
-            </a:pPr>
-            <a:r>
-              <a:t>🏛️ 【曾国藩的智慧】</a:t>
-            </a:r>
-          </a:p>
-        </p:txBody>
-      </p:sp>
-      <p:sp>
-        <p:nvSpPr>
-          <p:cNvPr id="10" name="TextBox 9"/>
-          <p:cNvSpPr txBox="1"/>
-          <p:nvPr/>
-        </p:nvSpPr>
-        <p:spPr>
-          <a:xfrm>
-            <a:off x="365760" y="4"/>
-            <a:ext cx="4114800" cy="731520"/>
-          </a:xfrm>
-          <a:prstGeom prst="rect">
-            <a:avLst/>
-          </a:prstGeom>
-          <a:noFill/>
-        </p:spPr>
-        <p:txBody>
-          <a:bodyPr wrap="square">
-            <a:spAutoFit/>
-          </a:bodyPr>
-          <a:lstStyle/>
-          <a:p>
-            <a:pPr>
-              <a:defRPr sz="1250">
-                <a:solidFill>
-                  <a:srgbClr val="321E0F"/>
-                </a:solidFill>
-              </a:defRPr>
-            </a:pPr>
-            <a:r>
-              <a:t>曾国藩平定太平天国后，主动削减湘军，裁撤万余兵力，向朝廷表明无政治野心。正是这份'功遂身退'的清醒，保全了自身与家族。</a:t>
-            </a:r>
-          </a:p>
-        </p:txBody>
-      </p:sp>
-      <p:sp>
-        <p:nvSpPr>
-          <p:cNvPr id="11" name="TextBox 10"/>
-          <p:cNvSpPr txBox="1"/>
-          <p:nvPr/>
-        </p:nvSpPr>
-        <p:spPr>
-          <a:xfrm>
-            <a:off x="4663440" y="1"/>
-            <a:ext cx="4114800" cy="731520"/>
-          </a:xfrm>
-          <a:prstGeom prst="rect">
-            <a:avLst/>
-          </a:prstGeom>
-          <a:noFill/>
-        </p:spPr>
-        <p:txBody>
-          <a:bodyPr wrap="square">
-            <a:spAutoFit/>
-          </a:bodyPr>
-          <a:lstStyle/>
-          <a:p>
-            <a:pPr>
-              <a:defRPr sz="1250">
-                <a:solidFill>
-                  <a:srgbClr val="321E0F"/>
-                </a:solidFill>
-              </a:defRPr>
-            </a:pPr>
-            <a:r>
-              <a:t>🌍 【国外案例】诺贝尔的明智选择</a:t>
-            </a:r>
-          </a:p>
-        </p:txBody>
-      </p:sp>
-      <p:sp>
-        <p:nvSpPr>
-          <p:cNvPr id="12" name="TextBox 11"/>
-          <p:cNvSpPr txBox="1"/>
-          <p:nvPr/>
-        </p:nvSpPr>
-        <p:spPr>
-          <a:xfrm>
-            <a:off x="4663440" y="2"/>
-            <a:ext cx="4114800" cy="731520"/>
-          </a:xfrm>
-          <a:prstGeom prst="rect">
-            <a:avLst/>
-          </a:prstGeom>
-          <a:noFill/>
-        </p:spPr>
-        <p:txBody>
-          <a:bodyPr wrap="square">
-            <a:spAutoFit/>
-          </a:bodyPr>
-          <a:lstStyle/>
-          <a:p>
-            <a:pPr>
-              <a:defRPr sz="1250">
-                <a:solidFill>
-                  <a:srgbClr val="321E0F"/>
-                </a:solidFill>
-              </a:defRPr>
-            </a:pPr>
-            <a:r>
-              <a:t>诺贝尔在世时将大部分财产设立和平奖，功成之后不将财富留给子孙，而是回馈社会。他的名字因此永垂不朽。</a:t>
-            </a:r>
-          </a:p>
-        </p:txBody>
-      </p:sp>
-      <p:sp>
-        <p:nvSpPr>
-          <p:cNvPr id="13" name="TextBox 12"/>
-          <p:cNvSpPr txBox="1"/>
-          <p:nvPr/>
-        </p:nvSpPr>
-        <p:spPr>
-          <a:xfrm>
-            <a:off x="4663440" y="3"/>
-            <a:ext cx="4114800" cy="731520"/>
-          </a:xfrm>
-          <a:prstGeom prst="rect">
-            <a:avLst/>
-          </a:prstGeom>
-          <a:noFill/>
-        </p:spPr>
-        <p:txBody>
-          <a:bodyPr wrap="square">
-            <a:spAutoFit/>
-          </a:bodyPr>
-          <a:lstStyle/>
-          <a:p>
-            <a:pPr>
-              <a:defRPr sz="1250">
-                <a:solidFill>
-                  <a:srgbClr val="321E0F"/>
-                </a:solidFill>
-              </a:defRPr>
-            </a:pPr>
-          </a:p>
-        </p:txBody>
-      </p:sp>
-      <p:sp>
-        <p:nvSpPr>
-          <p:cNvPr id="14" name="TextBox 13"/>
-          <p:cNvSpPr txBox="1"/>
-          <p:nvPr/>
-        </p:nvSpPr>
-        <p:spPr>
-          <a:xfrm>
-            <a:off x="4663440" y="4"/>
-            <a:ext cx="4114800" cy="731520"/>
-          </a:xfrm>
-          <a:prstGeom prst="rect">
-            <a:avLst/>
-          </a:prstGeom>
-          <a:noFill/>
-        </p:spPr>
-        <p:txBody>
-          <a:bodyPr wrap="square">
-            <a:spAutoFit/>
-          </a:bodyPr>
-          <a:lstStyle/>
-          <a:p>
-            <a:pPr>
-              <a:defRPr sz="1250">
-                <a:solidFill>
-                  <a:srgbClr val="321E0F"/>
-                </a:solidFill>
-              </a:defRPr>
-            </a:pPr>
-            <a:r>
-              <a:t>💡 【投资理财启示】</a:t>
-            </a:r>
-          </a:p>
-        </p:txBody>
-      </p:sp>
-      <p:sp>
-        <p:nvSpPr>
-          <p:cNvPr id="15" name="TextBox 14"/>
-          <p:cNvSpPr txBox="1"/>
-          <p:nvPr/>
-        </p:nvSpPr>
-        <p:spPr>
-          <a:xfrm>
-            <a:off x="4663440" y="4"/>
-            <a:ext cx="4114800" cy="731520"/>
-          </a:xfrm>
-          <a:prstGeom prst="rect">
-            <a:avLst/>
-          </a:prstGeom>
-          <a:noFill/>
-        </p:spPr>
-        <p:txBody>
-          <a:bodyPr wrap="square">
-            <a:spAutoFit/>
-          </a:bodyPr>
-          <a:lstStyle/>
-          <a:p>
-            <a:pPr>
-              <a:defRPr sz="1250">
-                <a:solidFill>
-                  <a:srgbClr val="321E0F"/>
-                </a:solidFill>
-              </a:defRPr>
-            </a:pPr>
-            <a:r>
-              <a:t>'金玉满堂，莫之能守'——单一资产过于集中，风险极高。分散配置、适时止盈，是现代投资对这一古老智慧的最佳注解。</a:t>
+                  <a:srgbClr val="969696"/>
+                </a:solidFill>
+              </a:defRPr>
+            </a:pPr>
+            <a:r>
+              <a:t>9/12</a:t>
             </a:r>
           </a:p>
         </p:txBody>
